--- a/Final presentation.pptx
+++ b/Final presentation.pptx
@@ -125,6 +125,15 @@
     </p:ext>
   </p:extLst>
 </p:presentation>
+</file>
+
+<file path=ppt/revisionInfo.xml><?xml version="1.0" encoding="utf-8"?>
+<p1510:revInfo xmlns:a="http://schemas.openxmlformats.org/drawingml/2006/main" xmlns:r="http://schemas.openxmlformats.org/officeDocument/2006/relationships" xmlns:p1510="http://schemas.microsoft.com/office/powerpoint/2015/10/main">
+  <p1510:revLst>
+    <p1510:client id="{49703639-65F7-8046-8DC0-743283267945}" v="8" dt="2026-05-06T20:07:38.386"/>
+    <p1510:client id="{7B8CE4A0-5CD9-B54F-9EDC-2D8BA90DD913}" v="1" dt="2026-05-06T20:04:03.825"/>
+  </p1510:revLst>
+</p1510:revInfo>
 </file>
 
 <file path=ppt/diagrams/colors1.xml><?xml version="1.0" encoding="utf-8"?>
@@ -3095,7 +3104,7 @@
           <a:p>
             <a:fld id="{785FC84C-18EF-F34B-9A0D-D22B2A85EBCB}" type="datetimeFigureOut">
               <a:rPr lang="en-US" smtClean="0"/>
-              <a:t>5/5/26</a:t>
+              <a:t>5/6/26</a:t>
             </a:fld>
             <a:endParaRPr lang="en-US"/>
           </a:p>
@@ -3406,45 +3415,6 @@
           <a:bodyPr/>
           <a:lstStyle/>
           <a:p>
-            <a:r>
-              <a:rPr lang="en-US" dirty="0"/>
-              <a:t>Useful for: </a:t>
-            </a:r>
-          </a:p>
-          <a:p>
-            <a:pPr lvl="1"/>
-            <a:r>
-              <a:rPr lang="en-US" dirty="0"/>
-              <a:t>image compression </a:t>
-            </a:r>
-          </a:p>
-          <a:p>
-            <a:pPr lvl="1"/>
-            <a:r>
-              <a:rPr lang="en-US" dirty="0"/>
-              <a:t>noise removal </a:t>
-            </a:r>
-          </a:p>
-          <a:p>
-            <a:pPr lvl="1"/>
-            <a:r>
-              <a:rPr lang="en-US" dirty="0"/>
-              <a:t>anomaly detection </a:t>
-            </a:r>
-          </a:p>
-          <a:p>
-            <a:r>
-              <a:rPr lang="en-US" b="1" dirty="0"/>
-              <a:t>Example</a:t>
-            </a:r>
-          </a:p>
-          <a:p>
-            <a:r>
-              <a:rPr lang="en-US" dirty="0"/>
-              <a:t>For an image, the model tries to recreate the original image while keeping only the most important information.</a:t>
-            </a:r>
-          </a:p>
-          <a:p>
             <a:endParaRPr lang="en-US" dirty="0"/>
           </a:p>
         </p:txBody>
@@ -3529,155 +3499,6 @@
           <a:bodyPr/>
           <a:lstStyle/>
           <a:p>
-            <a:r>
-              <a:rPr lang="en-US" sz="1200" b="0" i="0" kern="1200" dirty="0" err="1">
-                <a:solidFill>
-                  <a:schemeClr val="tx1"/>
-                </a:solidFill>
-                <a:effectLst/>
-                <a:latin typeface="+mn-lt"/>
-                <a:ea typeface="+mn-ea"/>
-                <a:cs typeface="+mn-cs"/>
-              </a:rPr>
-              <a:t>transforms.ToTensor</a:t>
-            </a:r>
-            <a:r>
-              <a:rPr lang="en-US" sz="1200" b="0" i="0" kern="1200" dirty="0">
-                <a:solidFill>
-                  <a:schemeClr val="tx1"/>
-                </a:solidFill>
-                <a:effectLst/>
-                <a:latin typeface="+mn-lt"/>
-                <a:ea typeface="+mn-ea"/>
-                <a:cs typeface="+mn-cs"/>
-              </a:rPr>
-              <a:t>(): This converts the images into tensors and scales the pixel between </a:t>
-            </a:r>
-            <a:r>
-              <a:rPr lang="en-US" sz="1200" b="1" i="0" kern="1200" dirty="0">
-                <a:solidFill>
-                  <a:schemeClr val="tx1"/>
-                </a:solidFill>
-                <a:effectLst/>
-                <a:latin typeface="+mn-lt"/>
-                <a:ea typeface="+mn-ea"/>
-                <a:cs typeface="+mn-cs"/>
-              </a:rPr>
-              <a:t>0 and 1</a:t>
-            </a:r>
-            <a:r>
-              <a:rPr lang="en-US" sz="1200" b="0" i="0" kern="1200" dirty="0">
-                <a:solidFill>
-                  <a:schemeClr val="tx1"/>
-                </a:solidFill>
-                <a:effectLst/>
-                <a:latin typeface="+mn-lt"/>
-                <a:ea typeface="+mn-ea"/>
-                <a:cs typeface="+mn-cs"/>
-              </a:rPr>
-              <a:t>.</a:t>
-            </a:r>
-          </a:p>
-          <a:p>
-            <a:r>
-              <a:rPr lang="en-US" sz="1200" b="0" i="0" kern="1200" dirty="0" err="1">
-                <a:solidFill>
-                  <a:schemeClr val="tx1"/>
-                </a:solidFill>
-                <a:effectLst/>
-                <a:latin typeface="+mn-lt"/>
-                <a:ea typeface="+mn-ea"/>
-                <a:cs typeface="+mn-cs"/>
-              </a:rPr>
-              <a:t>transforms.Normalize</a:t>
-            </a:r>
-            <a:r>
-              <a:rPr lang="en-US" sz="1200" b="0" i="0" kern="1200" dirty="0">
-                <a:solidFill>
-                  <a:schemeClr val="tx1"/>
-                </a:solidFill>
-                <a:effectLst/>
-                <a:latin typeface="+mn-lt"/>
-                <a:ea typeface="+mn-ea"/>
-                <a:cs typeface="+mn-cs"/>
-              </a:rPr>
-              <a:t>((0.5), (0.5)): This specifically shifts the data range from to </a:t>
-            </a:r>
-            <a:r>
-              <a:rPr lang="en-US" sz="1200" b="1" i="0" kern="1200" dirty="0">
-                <a:solidFill>
-                  <a:schemeClr val="tx1"/>
-                </a:solidFill>
-                <a:effectLst/>
-                <a:latin typeface="+mn-lt"/>
-                <a:ea typeface="+mn-ea"/>
-                <a:cs typeface="+mn-cs"/>
-              </a:rPr>
-              <a:t>-1 and +1</a:t>
-            </a:r>
-            <a:r>
-              <a:rPr lang="en-US" sz="1200" b="0" i="0" kern="1200" dirty="0">
-                <a:solidFill>
-                  <a:schemeClr val="tx1"/>
-                </a:solidFill>
-                <a:effectLst/>
-                <a:latin typeface="+mn-lt"/>
-                <a:ea typeface="+mn-ea"/>
-                <a:cs typeface="+mn-cs"/>
-              </a:rPr>
-              <a:t>.</a:t>
-            </a:r>
-          </a:p>
-          <a:p>
-            <a:r>
-              <a:rPr lang="en-US" sz="1200" b="0" i="0" kern="1200" dirty="0" err="1">
-                <a:solidFill>
-                  <a:schemeClr val="tx1"/>
-                </a:solidFill>
-                <a:effectLst/>
-                <a:latin typeface="+mn-lt"/>
-                <a:ea typeface="+mn-ea"/>
-                <a:cs typeface="+mn-cs"/>
-              </a:rPr>
-              <a:t>mnist_data</a:t>
-            </a:r>
-            <a:r>
-              <a:rPr lang="en-US" sz="1200" b="0" i="0" kern="1200" dirty="0">
-                <a:solidFill>
-                  <a:schemeClr val="tx1"/>
-                </a:solidFill>
-                <a:effectLst/>
-                <a:latin typeface="+mn-lt"/>
-                <a:ea typeface="+mn-ea"/>
-                <a:cs typeface="+mn-cs"/>
-              </a:rPr>
-              <a:t> : reads the data </a:t>
-            </a:r>
-          </a:p>
-          <a:p>
-            <a:r>
-              <a:rPr lang="en-US" sz="1200" b="0" kern="1200" dirty="0" err="1">
-                <a:solidFill>
-                  <a:schemeClr val="tx1"/>
-                </a:solidFill>
-                <a:effectLst/>
-                <a:latin typeface="+mn-lt"/>
-                <a:ea typeface="+mn-ea"/>
-                <a:cs typeface="+mn-cs"/>
-              </a:rPr>
-              <a:t>data_loader</a:t>
-            </a:r>
-            <a:r>
-              <a:rPr lang="en-US" dirty="0">
-                <a:effectLst/>
-              </a:rPr>
-              <a:t> :I feeds the data into the training loop:</a:t>
-            </a:r>
-          </a:p>
-          <a:p>
-            <a:br>
-              <a:rPr lang="en-US" dirty="0"/>
-            </a:br>
             <a:endParaRPr lang="en-US" dirty="0"/>
           </a:p>
         </p:txBody>
@@ -3762,178 +3583,7 @@
           <a:bodyPr/>
           <a:lstStyle/>
           <a:p>
-            <a:r>
-              <a:rPr lang="en-US" dirty="0" err="1"/>
-              <a:t>dataiter</a:t>
-            </a:r>
-            <a:r>
-              <a:rPr lang="en-US" dirty="0"/>
-              <a:t> = = creates an </a:t>
-            </a:r>
-            <a:r>
-              <a:rPr lang="en-US" b="1" dirty="0"/>
-              <a:t>iterator</a:t>
-            </a:r>
-            <a:r>
-              <a:rPr lang="en-US" dirty="0"/>
-              <a:t>  which lets you move through the dataset </a:t>
-            </a:r>
-            <a:r>
-              <a:rPr lang="en-US" b="1" dirty="0"/>
-              <a:t>one batch at a time</a:t>
-            </a:r>
-          </a:p>
-          <a:p>
-            <a:r>
-              <a:rPr lang="en-US" sz="1200" b="1" kern="1200" dirty="0">
-                <a:solidFill>
-                  <a:schemeClr val="tx1"/>
-                </a:solidFill>
-                <a:latin typeface="+mn-lt"/>
-                <a:ea typeface="+mn-ea"/>
-                <a:cs typeface="+mn-cs"/>
-              </a:rPr>
-              <a:t>images, labels = next(</a:t>
-            </a:r>
-            <a:r>
-              <a:rPr lang="en-US" sz="1200" b="1" kern="1200" dirty="0" err="1">
-                <a:solidFill>
-                  <a:schemeClr val="tx1"/>
-                </a:solidFill>
-                <a:latin typeface="+mn-lt"/>
-                <a:ea typeface="+mn-ea"/>
-                <a:cs typeface="+mn-cs"/>
-              </a:rPr>
-              <a:t>dataiter</a:t>
-            </a:r>
-            <a:r>
-              <a:rPr lang="en-US" sz="1200" b="1" kern="1200" dirty="0">
-                <a:solidFill>
-                  <a:schemeClr val="tx1"/>
-                </a:solidFill>
-                <a:latin typeface="+mn-lt"/>
-                <a:ea typeface="+mn-ea"/>
-                <a:cs typeface="+mn-cs"/>
-              </a:rPr>
-              <a:t>)</a:t>
-            </a:r>
-            <a:r>
-              <a:rPr lang="en-US" dirty="0"/>
-              <a:t>: This gets the </a:t>
-            </a:r>
-            <a:r>
-              <a:rPr lang="en-US" b="1" dirty="0"/>
-              <a:t>next batch of data</a:t>
-            </a:r>
-            <a:r>
-              <a:rPr lang="en-US" dirty="0"/>
-              <a:t> from the iterator. </a:t>
-            </a:r>
-          </a:p>
-          <a:p>
-            <a:pPr marL="0" marR="0" lvl="0" indent="0" algn="l" defTabSz="914400" rtl="0" eaLnBrk="1" fontAlgn="auto" latinLnBrk="0" hangingPunct="1">
-              <a:lnSpc>
-                <a:spcPct val="100000"/>
-              </a:lnSpc>
-              <a:spcBef>
-                <a:spcPts val="0"/>
-              </a:spcBef>
-              <a:spcAft>
-                <a:spcPts val="0"/>
-              </a:spcAft>
-              <a:buClrTx/>
-              <a:buSzTx/>
-              <a:buFontTx/>
-              <a:buNone/>
-              <a:tabLst/>
-              <a:defRPr/>
-            </a:pPr>
-            <a:r>
-              <a:rPr lang="en-US" sz="1200" b="1" kern="1200" dirty="0">
-                <a:solidFill>
-                  <a:schemeClr val="tx1"/>
-                </a:solidFill>
-                <a:latin typeface="+mn-lt"/>
-                <a:ea typeface="+mn-ea"/>
-                <a:cs typeface="+mn-cs"/>
-              </a:rPr>
-              <a:t>print(</a:t>
-            </a:r>
-            <a:r>
-              <a:rPr lang="en-US" sz="1200" b="1" kern="1200" dirty="0" err="1">
-                <a:solidFill>
-                  <a:schemeClr val="tx1"/>
-                </a:solidFill>
-                <a:latin typeface="+mn-lt"/>
-                <a:ea typeface="+mn-ea"/>
-                <a:cs typeface="+mn-cs"/>
-              </a:rPr>
-              <a:t>torch.min</a:t>
-            </a:r>
-            <a:r>
-              <a:rPr lang="en-US" sz="1200" b="1" kern="1200" dirty="0">
-                <a:solidFill>
-                  <a:schemeClr val="tx1"/>
-                </a:solidFill>
-                <a:latin typeface="+mn-lt"/>
-                <a:ea typeface="+mn-ea"/>
-                <a:cs typeface="+mn-cs"/>
-              </a:rPr>
-              <a:t>(images), </a:t>
-            </a:r>
-            <a:r>
-              <a:rPr lang="en-US" sz="1200" b="1" kern="1200" dirty="0" err="1">
-                <a:solidFill>
-                  <a:schemeClr val="tx1"/>
-                </a:solidFill>
-                <a:latin typeface="+mn-lt"/>
-                <a:ea typeface="+mn-ea"/>
-                <a:cs typeface="+mn-cs"/>
-              </a:rPr>
-              <a:t>torch.max</a:t>
-            </a:r>
-            <a:r>
-              <a:rPr lang="en-US" sz="1200" b="1" kern="1200" dirty="0">
-                <a:solidFill>
-                  <a:schemeClr val="tx1"/>
-                </a:solidFill>
-                <a:latin typeface="+mn-lt"/>
-                <a:ea typeface="+mn-ea"/>
-                <a:cs typeface="+mn-cs"/>
-              </a:rPr>
-              <a:t>(images))</a:t>
-            </a:r>
-            <a:r>
-              <a:rPr lang="en-US" dirty="0"/>
-              <a:t>: This prints the </a:t>
-            </a:r>
-            <a:r>
-              <a:rPr lang="en-US" b="1" dirty="0"/>
-              <a:t>minimum and maximum pixel values</a:t>
-            </a:r>
-          </a:p>
-          <a:p>
-            <a:pPr marL="0" marR="0" lvl="0" indent="0" algn="l" defTabSz="914400" rtl="0" eaLnBrk="1" fontAlgn="auto" latinLnBrk="0" hangingPunct="1">
-              <a:lnSpc>
-                <a:spcPct val="100000"/>
-              </a:lnSpc>
-              <a:spcBef>
-                <a:spcPts val="0"/>
-              </a:spcBef>
-              <a:spcAft>
-                <a:spcPts val="0"/>
-              </a:spcAft>
-              <a:buClrTx/>
-              <a:buSzTx/>
-              <a:buFontTx/>
-              <a:buNone/>
-              <a:tabLst/>
-              <a:defRPr/>
-            </a:pPr>
-            <a:r>
-              <a:rPr lang="en-US" b="1" dirty="0"/>
-              <a:t>Output : so this is the min and this is the max </a:t>
-            </a:r>
+            <a:endParaRPr lang="en-US" b="1" dirty="0"/>
           </a:p>
         </p:txBody>
       </p:sp>
@@ -4016,465 +3666,6 @@
         <p:txBody>
           <a:bodyPr/>
           <a:lstStyle/>
-          <a:p>
-            <a:r>
-              <a:rPr lang="en-US" dirty="0"/>
-              <a:t>So there are two parts, an encoder and a decoder</a:t>
-            </a:r>
-          </a:p>
-          <a:p>
-            <a:endParaRPr lang="en-US" dirty="0"/>
-          </a:p>
-          <a:p>
-            <a:r>
-              <a:rPr lang="en-US" b="1" dirty="0"/>
-              <a:t>This is a linear encoder and </a:t>
-            </a:r>
-            <a:r>
-              <a:rPr lang="en-US" dirty="0"/>
-              <a:t>Its job is to </a:t>
-            </a:r>
-            <a:r>
-              <a:rPr lang="en-US" b="1" dirty="0"/>
-              <a:t>compress the input by repeatedly reducing the number of features</a:t>
-            </a:r>
-            <a:r>
-              <a:rPr lang="en-US" dirty="0"/>
-              <a:t>, then reconstruct the original image.</a:t>
-            </a:r>
-          </a:p>
-          <a:p>
-            <a:endParaRPr lang="en-US" dirty="0"/>
-          </a:p>
-          <a:p>
-            <a:r>
-              <a:rPr lang="en-US" sz="1200" b="1" kern="1200" dirty="0" err="1">
-                <a:solidFill>
-                  <a:schemeClr val="tx1"/>
-                </a:solidFill>
-                <a:latin typeface="+mn-lt"/>
-                <a:ea typeface="+mn-ea"/>
-                <a:cs typeface="+mn-cs"/>
-              </a:rPr>
-              <a:t>nn.Linear</a:t>
-            </a:r>
-            <a:r>
-              <a:rPr lang="en-US" sz="1200" b="1" kern="1200" dirty="0">
-                <a:solidFill>
-                  <a:schemeClr val="tx1"/>
-                </a:solidFill>
-                <a:latin typeface="+mn-lt"/>
-                <a:ea typeface="+mn-ea"/>
-                <a:cs typeface="+mn-cs"/>
-              </a:rPr>
-              <a:t>(28 * 28, 128)</a:t>
-            </a:r>
-            <a:r>
-              <a:rPr lang="en-US" dirty="0"/>
-              <a:t>:Takes a </a:t>
-            </a:r>
-            <a:r>
-              <a:rPr lang="en-US" b="1" dirty="0"/>
-              <a:t>28×28 image (784 values)</a:t>
-            </a:r>
-            <a:r>
-              <a:rPr lang="en-US" dirty="0"/>
-              <a:t> and reduces it to </a:t>
-            </a:r>
-            <a:r>
-              <a:rPr lang="en-US" b="1" dirty="0"/>
-              <a:t>128 features</a:t>
-            </a:r>
-            <a:r>
-              <a:rPr lang="en-US" dirty="0"/>
-              <a:t>. </a:t>
-            </a:r>
-          </a:p>
-          <a:p>
-            <a:r>
-              <a:rPr lang="en-US" sz="1200" b="1" kern="1200" dirty="0" err="1">
-                <a:solidFill>
-                  <a:schemeClr val="tx1"/>
-                </a:solidFill>
-                <a:latin typeface="+mn-lt"/>
-                <a:ea typeface="+mn-ea"/>
-                <a:cs typeface="+mn-cs"/>
-              </a:rPr>
-              <a:t>nn.Linear</a:t>
-            </a:r>
-            <a:r>
-              <a:rPr lang="en-US" sz="1200" b="1" kern="1200" dirty="0">
-                <a:solidFill>
-                  <a:schemeClr val="tx1"/>
-                </a:solidFill>
-                <a:latin typeface="+mn-lt"/>
-                <a:ea typeface="+mn-ea"/>
-                <a:cs typeface="+mn-cs"/>
-              </a:rPr>
-              <a:t>(128, 64): </a:t>
-            </a:r>
-            <a:r>
-              <a:rPr lang="en-US" dirty="0"/>
-              <a:t>Compresses </a:t>
-            </a:r>
-            <a:r>
-              <a:rPr lang="en-US" b="1" dirty="0"/>
-              <a:t>128 → 64</a:t>
-            </a:r>
-            <a:r>
-              <a:rPr lang="en-US" dirty="0"/>
-              <a:t>. </a:t>
-            </a:r>
-          </a:p>
-          <a:p>
-            <a:r>
-              <a:rPr lang="en-US" dirty="0"/>
-              <a:t>At the end, the image is represented by only </a:t>
-            </a:r>
-            <a:r>
-              <a:rPr lang="en-US" b="1" dirty="0"/>
-              <a:t>3 numbers</a:t>
-            </a:r>
-            <a:r>
-              <a:rPr lang="en-US" dirty="0"/>
-              <a:t>.</a:t>
-            </a:r>
-            <a:br>
-              <a:rPr lang="en-US" dirty="0"/>
-            </a:br>
-            <a:r>
-              <a:rPr lang="en-US" dirty="0"/>
-              <a:t>This is called </a:t>
-            </a:r>
-            <a:r>
-              <a:rPr lang="en-US" b="1" dirty="0"/>
-              <a:t>embedding</a:t>
-            </a:r>
-          </a:p>
-          <a:p>
-            <a:endParaRPr lang="en-US" b="1" dirty="0"/>
-          </a:p>
-          <a:p>
-            <a:pPr marL="0" marR="0" lvl="0" indent="0" algn="l" defTabSz="914400" rtl="0" eaLnBrk="1" fontAlgn="auto" latinLnBrk="0" hangingPunct="1">
-              <a:lnSpc>
-                <a:spcPct val="100000"/>
-              </a:lnSpc>
-              <a:spcBef>
-                <a:spcPts val="0"/>
-              </a:spcBef>
-              <a:spcAft>
-                <a:spcPts val="0"/>
-              </a:spcAft>
-              <a:buClrTx/>
-              <a:buSzTx/>
-              <a:buFontTx/>
-              <a:buNone/>
-              <a:tabLst/>
-              <a:defRPr/>
-            </a:pPr>
-            <a:r>
-              <a:rPr lang="en-US" sz="1200" b="1" kern="1200" dirty="0" err="1">
-                <a:solidFill>
-                  <a:schemeClr val="tx1"/>
-                </a:solidFill>
-                <a:latin typeface="+mn-lt"/>
-                <a:ea typeface="+mn-ea"/>
-                <a:cs typeface="+mn-cs"/>
-              </a:rPr>
-              <a:t>nn.ReLU</a:t>
-            </a:r>
-            <a:r>
-              <a:rPr lang="en-US" sz="1200" b="1" kern="1200" dirty="0">
-                <a:solidFill>
-                  <a:schemeClr val="tx1"/>
-                </a:solidFill>
-                <a:latin typeface="+mn-lt"/>
-                <a:ea typeface="+mn-ea"/>
-                <a:cs typeface="+mn-cs"/>
-              </a:rPr>
-              <a:t>()</a:t>
-            </a:r>
-            <a:r>
-              <a:rPr lang="en-US" dirty="0"/>
-              <a:t> adds </a:t>
-            </a:r>
-            <a:r>
-              <a:rPr lang="en-US" b="1" dirty="0"/>
-              <a:t>non-linearity</a:t>
-            </a:r>
-            <a:r>
-              <a:rPr lang="en-US" dirty="0"/>
-              <a:t>, which helps the network learn more complex patterns. </a:t>
-            </a:r>
-          </a:p>
-          <a:p>
-            <a:endParaRPr lang="en-US" b="1" dirty="0"/>
-          </a:p>
-          <a:p>
-            <a:endParaRPr lang="en-US" dirty="0"/>
-          </a:p>
-          <a:p>
-            <a:r>
-              <a:rPr lang="en-US" b="1" dirty="0"/>
-              <a:t>Decoder (reconstruction)</a:t>
-            </a:r>
-          </a:p>
-          <a:p>
-            <a:r>
-              <a:rPr lang="en-US" dirty="0"/>
-              <a:t>The </a:t>
-            </a:r>
-            <a:r>
-              <a:rPr lang="en-US" b="1" dirty="0"/>
-              <a:t>decoder reverses the process</a:t>
-            </a:r>
-            <a:r>
-              <a:rPr lang="en-US" dirty="0"/>
-              <a:t> and rebuilds the image.</a:t>
-            </a:r>
-          </a:p>
-          <a:p>
-            <a:r>
-              <a:rPr lang="en-US" sz="1200" b="1" kern="1200" dirty="0">
-                <a:solidFill>
-                  <a:schemeClr val="tx1"/>
-                </a:solidFill>
-                <a:latin typeface="+mn-lt"/>
-                <a:ea typeface="+mn-ea"/>
-                <a:cs typeface="+mn-cs"/>
-              </a:rPr>
-              <a:t>3 → 12 → 64 → 128 → 784</a:t>
-            </a:r>
-            <a:r>
-              <a:rPr lang="en-US" dirty="0"/>
-              <a:t> </a:t>
-            </a:r>
-          </a:p>
-          <a:p>
-            <a:r>
-              <a:rPr lang="en-US" dirty="0"/>
-              <a:t>It expands the compressed embedding back into </a:t>
-            </a:r>
-            <a:r>
-              <a:rPr lang="en-US" b="1" dirty="0"/>
-              <a:t>784 output values</a:t>
-            </a:r>
-            <a:r>
-              <a:rPr lang="en-US" dirty="0"/>
-              <a:t>, which can be reshaped into a </a:t>
-            </a:r>
-            <a:r>
-              <a:rPr lang="en-US" b="1" dirty="0"/>
-              <a:t>28×28 image</a:t>
-            </a:r>
-            <a:r>
-              <a:rPr lang="en-US" dirty="0"/>
-              <a:t>.</a:t>
-            </a:r>
-          </a:p>
-          <a:p>
-            <a:endParaRPr lang="en-US" dirty="0"/>
-          </a:p>
-          <a:p>
-            <a:r>
-              <a:rPr lang="en-US" b="1" dirty="0"/>
-              <a:t>Activation functions</a:t>
-            </a:r>
-          </a:p>
-          <a:p>
-            <a:endParaRPr lang="en-US" b="1" dirty="0"/>
-          </a:p>
-          <a:p>
-            <a:r>
-              <a:rPr lang="en-US" sz="1200" b="1" kern="1200" dirty="0" err="1">
-                <a:solidFill>
-                  <a:schemeClr val="tx1"/>
-                </a:solidFill>
-                <a:latin typeface="+mn-lt"/>
-                <a:ea typeface="+mn-ea"/>
-                <a:cs typeface="+mn-cs"/>
-              </a:rPr>
-              <a:t>nn.Sigmoid</a:t>
-            </a:r>
-            <a:r>
-              <a:rPr lang="en-US" sz="1200" b="1" kern="1200" dirty="0">
-                <a:solidFill>
-                  <a:schemeClr val="tx1"/>
-                </a:solidFill>
-                <a:latin typeface="+mn-lt"/>
-                <a:ea typeface="+mn-ea"/>
-                <a:cs typeface="+mn-cs"/>
-              </a:rPr>
-              <a:t>()</a:t>
-            </a:r>
-            <a:r>
-              <a:rPr lang="en-US" dirty="0"/>
-              <a:t> is used at the end because the image pixel values are between </a:t>
-            </a:r>
-            <a:r>
-              <a:rPr lang="en-US" b="1" dirty="0"/>
-              <a:t>0 and 1</a:t>
-            </a:r>
-            <a:r>
-              <a:rPr lang="en-US" dirty="0"/>
-              <a:t>. </a:t>
-            </a:r>
-          </a:p>
-          <a:p>
-            <a:endParaRPr lang="en-US" dirty="0"/>
-          </a:p>
-          <a:p>
-            <a:pPr marL="0" marR="0" lvl="0" indent="0" algn="l" defTabSz="914400" rtl="0" eaLnBrk="1" fontAlgn="auto" latinLnBrk="0" hangingPunct="1">
-              <a:lnSpc>
-                <a:spcPct val="100000"/>
-              </a:lnSpc>
-              <a:spcBef>
-                <a:spcPts val="0"/>
-              </a:spcBef>
-              <a:spcAft>
-                <a:spcPts val="0"/>
-              </a:spcAft>
-              <a:buClrTx/>
-              <a:buSzTx/>
-              <a:buFontTx/>
-              <a:buNone/>
-              <a:tabLst/>
-              <a:defRPr/>
-            </a:pPr>
-            <a:r>
-              <a:rPr lang="en-US" sz="1200" kern="1200" dirty="0">
-                <a:solidFill>
-                  <a:schemeClr val="tx1"/>
-                </a:solidFill>
-                <a:latin typeface="+mn-lt"/>
-                <a:ea typeface="+mn-ea"/>
-                <a:cs typeface="+mn-cs"/>
-              </a:rPr>
-              <a:t>encoded = </a:t>
-            </a:r>
-            <a:r>
-              <a:rPr lang="en-US" sz="1200" kern="1200" dirty="0" err="1">
-                <a:solidFill>
-                  <a:schemeClr val="tx1"/>
-                </a:solidFill>
-                <a:latin typeface="+mn-lt"/>
-                <a:ea typeface="+mn-ea"/>
-                <a:cs typeface="+mn-cs"/>
-              </a:rPr>
-              <a:t>self.encoder</a:t>
-            </a:r>
-            <a:r>
-              <a:rPr lang="en-US" sz="1200" kern="1200" dirty="0">
-                <a:solidFill>
-                  <a:schemeClr val="tx1"/>
-                </a:solidFill>
-                <a:latin typeface="+mn-lt"/>
-                <a:ea typeface="+mn-ea"/>
-                <a:cs typeface="+mn-cs"/>
-              </a:rPr>
-              <a:t>(x): </a:t>
-            </a:r>
-            <a:r>
-              <a:rPr lang="en-US" dirty="0"/>
-              <a:t>The input first goes through the </a:t>
-            </a:r>
-            <a:r>
-              <a:rPr lang="en-US" b="1" dirty="0"/>
-              <a:t>encoder</a:t>
-            </a:r>
-            <a:r>
-              <a:rPr lang="en-US" dirty="0"/>
-              <a:t>  to create the compressed representation</a:t>
-            </a:r>
-            <a:br>
-              <a:rPr lang="en-US" sz="1200" kern="1200" dirty="0">
-                <a:solidFill>
-                  <a:schemeClr val="tx1"/>
-                </a:solidFill>
-                <a:latin typeface="+mn-lt"/>
-                <a:ea typeface="+mn-ea"/>
-                <a:cs typeface="+mn-cs"/>
-              </a:rPr>
-            </a:br>
-            <a:r>
-              <a:rPr lang="en-US" sz="1200" kern="1200" dirty="0">
-                <a:solidFill>
-                  <a:schemeClr val="tx1"/>
-                </a:solidFill>
-                <a:latin typeface="+mn-lt"/>
-                <a:ea typeface="+mn-ea"/>
-                <a:cs typeface="+mn-cs"/>
-              </a:rPr>
-              <a:t>decoded = </a:t>
-            </a:r>
-            <a:r>
-              <a:rPr lang="en-US" sz="1200" kern="1200" dirty="0" err="1">
-                <a:solidFill>
-                  <a:schemeClr val="tx1"/>
-                </a:solidFill>
-                <a:latin typeface="+mn-lt"/>
-                <a:ea typeface="+mn-ea"/>
-                <a:cs typeface="+mn-cs"/>
-              </a:rPr>
-              <a:t>self.decoder</a:t>
-            </a:r>
-            <a:r>
-              <a:rPr lang="en-US" sz="1200" kern="1200" dirty="0">
-                <a:solidFill>
-                  <a:schemeClr val="tx1"/>
-                </a:solidFill>
-                <a:latin typeface="+mn-lt"/>
-                <a:ea typeface="+mn-ea"/>
-                <a:cs typeface="+mn-cs"/>
-              </a:rPr>
-              <a:t>(encoded): </a:t>
-            </a:r>
-            <a:r>
-              <a:rPr lang="en-US" dirty="0"/>
-              <a:t>Then the compressed representation goes through the </a:t>
-            </a:r>
-            <a:r>
-              <a:rPr lang="en-US" b="1" dirty="0"/>
-              <a:t>decoder</a:t>
-            </a:r>
-            <a:r>
-              <a:rPr lang="en-US" dirty="0"/>
-              <a:t> </a:t>
-            </a:r>
-          </a:p>
-          <a:p>
-            <a:pPr marL="0" marR="0" lvl="0" indent="0" algn="l" defTabSz="914400" rtl="0" eaLnBrk="1" fontAlgn="auto" latinLnBrk="0" hangingPunct="1">
-              <a:lnSpc>
-                <a:spcPct val="100000"/>
-              </a:lnSpc>
-              <a:spcBef>
-                <a:spcPts val="0"/>
-              </a:spcBef>
-              <a:spcAft>
-                <a:spcPts val="0"/>
-              </a:spcAft>
-              <a:buClrTx/>
-              <a:buSzTx/>
-              <a:buFontTx/>
-              <a:buNone/>
-              <a:tabLst/>
-              <a:defRPr/>
-            </a:pPr>
-            <a:endParaRPr lang="en-US" dirty="0"/>
-          </a:p>
-          <a:p>
-            <a:endParaRPr lang="en-US" b="1" dirty="0"/>
-          </a:p>
-          <a:p>
-            <a:r>
-              <a:rPr lang="en-US" b="1" dirty="0"/>
-              <a:t>The encoder repeatedly reduces the input size until only 3 features remain, and the decoder expands those 3 features back into the original image.</a:t>
-            </a:r>
-            <a:endParaRPr lang="en-US" dirty="0"/>
-          </a:p>
-          <a:p>
-            <a:endParaRPr lang="en-US" dirty="0"/>
-          </a:p>
           <a:p>
             <a:endParaRPr lang="en-US" dirty="0"/>
           </a:p>
@@ -4559,413 +3750,6 @@
         <p:txBody>
           <a:bodyPr/>
           <a:lstStyle/>
-          <a:p>
-            <a:r>
-              <a:rPr lang="en-US" dirty="0"/>
-              <a:t>convolutional </a:t>
-            </a:r>
-            <a:r>
-              <a:rPr lang="en-US" b="1" dirty="0"/>
-              <a:t>Encoder: </a:t>
-            </a:r>
-            <a:r>
-              <a:rPr lang="en-US" dirty="0"/>
-              <a:t>The encoder </a:t>
-            </a:r>
-            <a:r>
-              <a:rPr lang="en-US" b="1" dirty="0"/>
-              <a:t>reduces the image size step by step</a:t>
-            </a:r>
-            <a:r>
-              <a:rPr lang="en-US" dirty="0"/>
-              <a:t> while learning important visual features.</a:t>
-            </a:r>
-          </a:p>
-          <a:p>
-            <a:endParaRPr lang="en-US" dirty="0"/>
-          </a:p>
-          <a:p>
-            <a:r>
-              <a:rPr lang="en-US" sz="1200" b="1" kern="1200" dirty="0">
-                <a:solidFill>
-                  <a:schemeClr val="tx1"/>
-                </a:solidFill>
-                <a:latin typeface="+mn-lt"/>
-                <a:ea typeface="+mn-ea"/>
-                <a:cs typeface="+mn-cs"/>
-              </a:rPr>
-              <a:t>nn.Conv2d</a:t>
-            </a:r>
-            <a:r>
-              <a:rPr lang="en-US" dirty="0"/>
-              <a:t>Reduces the image from </a:t>
-            </a:r>
-            <a:r>
-              <a:rPr lang="en-US" b="1" dirty="0"/>
-              <a:t>28×28 → 14×14</a:t>
-            </a:r>
-            <a:r>
-              <a:rPr lang="en-US" dirty="0"/>
-              <a:t> and increases channels from </a:t>
-            </a:r>
-            <a:r>
-              <a:rPr lang="en-US" b="1" dirty="0"/>
-              <a:t>1 → 16</a:t>
-            </a:r>
-            <a:r>
-              <a:rPr lang="en-US" dirty="0"/>
-              <a:t> </a:t>
-            </a:r>
-          </a:p>
-          <a:p>
-            <a:r>
-              <a:rPr lang="en-US" sz="1200" b="1" kern="1200" dirty="0">
-                <a:solidFill>
-                  <a:schemeClr val="tx1"/>
-                </a:solidFill>
-                <a:latin typeface="+mn-lt"/>
-                <a:ea typeface="+mn-ea"/>
-                <a:cs typeface="+mn-cs"/>
-              </a:rPr>
-              <a:t>nn.Conv2d</a:t>
-            </a:r>
-            <a:r>
-              <a:rPr lang="en-US" dirty="0"/>
-              <a:t>Reduces </a:t>
-            </a:r>
-            <a:r>
-              <a:rPr lang="en-US" b="1" dirty="0"/>
-              <a:t>14×14 → 7×7</a:t>
-            </a:r>
-            <a:r>
-              <a:rPr lang="en-US" dirty="0"/>
-              <a:t> and increases channels from </a:t>
-            </a:r>
-            <a:r>
-              <a:rPr lang="en-US" b="1" dirty="0"/>
-              <a:t>16 → 32</a:t>
-            </a:r>
-            <a:r>
-              <a:rPr lang="en-US" dirty="0"/>
-              <a:t> </a:t>
-            </a:r>
-          </a:p>
-          <a:p>
-            <a:r>
-              <a:rPr lang="en-US" sz="1200" b="1" kern="1200" dirty="0">
-                <a:solidFill>
-                  <a:schemeClr val="tx1"/>
-                </a:solidFill>
-                <a:latin typeface="+mn-lt"/>
-                <a:ea typeface="+mn-ea"/>
-                <a:cs typeface="+mn-cs"/>
-              </a:rPr>
-              <a:t>nn.Conv2d(</a:t>
-            </a:r>
-            <a:r>
-              <a:rPr lang="en-US" dirty="0"/>
-              <a:t>Reduces </a:t>
-            </a:r>
-            <a:r>
-              <a:rPr lang="en-US" b="1" dirty="0"/>
-              <a:t>7×7 → 1×1</a:t>
-            </a:r>
-            <a:r>
-              <a:rPr lang="en-US" dirty="0"/>
-              <a:t> </a:t>
-            </a:r>
-          </a:p>
-          <a:p>
-            <a:endParaRPr lang="en-US" dirty="0"/>
-          </a:p>
-          <a:p>
-            <a:r>
-              <a:rPr lang="en-US" dirty="0"/>
-              <a:t>At the end, the image is compressed into a </a:t>
-            </a:r>
-            <a:r>
-              <a:rPr lang="en-US" b="1" dirty="0"/>
-              <a:t>64-feature latent representation</a:t>
-            </a:r>
-            <a:r>
-              <a:rPr lang="en-US" dirty="0"/>
-              <a:t> of shape:</a:t>
-            </a:r>
-          </a:p>
-          <a:p>
-            <a:br>
-              <a:rPr lang="en-US" dirty="0"/>
-            </a:br>
-            <a:endParaRPr lang="en-US" dirty="0"/>
-          </a:p>
-          <a:p>
-            <a:r>
-              <a:rPr lang="en-US" b="1" dirty="0"/>
-              <a:t>Decoder</a:t>
-            </a:r>
-          </a:p>
-          <a:p>
-            <a:r>
-              <a:rPr lang="en-US" dirty="0"/>
-              <a:t>The decoder </a:t>
-            </a:r>
-            <a:r>
-              <a:rPr lang="en-US" b="1" dirty="0"/>
-              <a:t>reverses the compression</a:t>
-            </a:r>
-            <a:r>
-              <a:rPr lang="en-US" dirty="0"/>
-              <a:t> and rebuilds the image.</a:t>
-            </a:r>
-          </a:p>
-          <a:p>
-            <a:r>
-              <a:rPr lang="en-US" sz="1200" b="1" kern="1200" dirty="0">
-                <a:solidFill>
-                  <a:schemeClr val="tx1"/>
-                </a:solidFill>
-                <a:latin typeface="+mn-lt"/>
-                <a:ea typeface="+mn-ea"/>
-                <a:cs typeface="+mn-cs"/>
-              </a:rPr>
-              <a:t>nn.ConvTranspose2d</a:t>
-            </a:r>
-            <a:r>
-              <a:rPr lang="en-US" dirty="0"/>
-              <a:t>Expands </a:t>
-            </a:r>
-            <a:r>
-              <a:rPr lang="en-US" b="1" dirty="0"/>
-              <a:t>1×1 → 7×7</a:t>
-            </a:r>
-            <a:r>
-              <a:rPr lang="en-US" dirty="0"/>
-              <a:t> </a:t>
-            </a:r>
-          </a:p>
-          <a:p>
-            <a:r>
-              <a:rPr lang="en-US" sz="1200" b="1" kern="1200" dirty="0">
-                <a:solidFill>
-                  <a:schemeClr val="tx1"/>
-                </a:solidFill>
-                <a:latin typeface="+mn-lt"/>
-                <a:ea typeface="+mn-ea"/>
-                <a:cs typeface="+mn-cs"/>
-              </a:rPr>
-              <a:t>nn.ConvTranspose2d</a:t>
-            </a:r>
-            <a:r>
-              <a:rPr lang="en-US" dirty="0"/>
-              <a:t>Expands </a:t>
-            </a:r>
-            <a:r>
-              <a:rPr lang="en-US" b="1" dirty="0"/>
-              <a:t>7×7 → 14×14</a:t>
-            </a:r>
-            <a:r>
-              <a:rPr lang="en-US" dirty="0"/>
-              <a:t> </a:t>
-            </a:r>
-          </a:p>
-          <a:p>
-            <a:r>
-              <a:rPr lang="en-US" sz="1200" b="1" kern="1200" dirty="0">
-                <a:solidFill>
-                  <a:schemeClr val="tx1"/>
-                </a:solidFill>
-                <a:latin typeface="+mn-lt"/>
-                <a:ea typeface="+mn-ea"/>
-                <a:cs typeface="+mn-cs"/>
-              </a:rPr>
-              <a:t>nn.ConvTranspose2d</a:t>
-            </a:r>
-            <a:r>
-              <a:rPr lang="en-US" dirty="0"/>
-              <a:t>Expands </a:t>
-            </a:r>
-            <a:r>
-              <a:rPr lang="en-US" b="1" dirty="0"/>
-              <a:t>14×14 → 28×28</a:t>
-            </a:r>
-            <a:r>
-              <a:rPr lang="en-US" dirty="0"/>
-              <a:t> </a:t>
-            </a:r>
-          </a:p>
-          <a:p>
-            <a:endParaRPr lang="en-US" dirty="0"/>
-          </a:p>
-          <a:p>
-            <a:r>
-              <a:rPr lang="en-US" sz="1200" b="1" kern="1200" dirty="0" err="1">
-                <a:solidFill>
-                  <a:schemeClr val="tx1"/>
-                </a:solidFill>
-                <a:latin typeface="+mn-lt"/>
-                <a:ea typeface="+mn-ea"/>
-                <a:cs typeface="+mn-cs"/>
-              </a:rPr>
-              <a:t>nn.Sigmoid</a:t>
-            </a:r>
-            <a:r>
-              <a:rPr lang="en-US" sz="1200" b="1" kern="1200" dirty="0">
-                <a:solidFill>
-                  <a:schemeClr val="tx1"/>
-                </a:solidFill>
-                <a:latin typeface="+mn-lt"/>
-                <a:ea typeface="+mn-ea"/>
-                <a:cs typeface="+mn-cs"/>
-              </a:rPr>
-              <a:t>()</a:t>
-            </a:r>
-            <a:br>
-              <a:rPr lang="en-US" dirty="0"/>
-            </a:br>
-            <a:r>
-              <a:rPr lang="en-US" dirty="0"/>
-              <a:t>Keeps output pixel values between </a:t>
-            </a:r>
-            <a:r>
-              <a:rPr lang="en-US" b="1" dirty="0"/>
-              <a:t>0 and 1</a:t>
-            </a:r>
-            <a:r>
-              <a:rPr lang="en-US" dirty="0"/>
-              <a:t> </a:t>
-            </a:r>
-          </a:p>
-          <a:p>
-            <a:br>
-              <a:rPr lang="en-US" dirty="0"/>
-            </a:br>
-            <a:endParaRPr lang="en-US" dirty="0"/>
-          </a:p>
-          <a:p>
-            <a:br>
-              <a:rPr lang="en-US" dirty="0"/>
-            </a:br>
-            <a:endParaRPr lang="en-US" dirty="0"/>
-          </a:p>
-          <a:p>
-            <a:r>
-              <a:rPr lang="en-US" b="1" dirty="0"/>
-              <a:t>Forward pass</a:t>
-            </a:r>
-          </a:p>
-          <a:p>
-            <a:pPr rtl="0"/>
-            <a:r>
-              <a:rPr lang="en-US" sz="1200" kern="1200" dirty="0">
-                <a:solidFill>
-                  <a:schemeClr val="tx1"/>
-                </a:solidFill>
-                <a:latin typeface="+mn-lt"/>
-                <a:ea typeface="+mn-ea"/>
-                <a:cs typeface="+mn-cs"/>
-              </a:rPr>
-              <a:t>encoded = </a:t>
-            </a:r>
-            <a:r>
-              <a:rPr lang="en-US" sz="1200" kern="1200" dirty="0" err="1">
-                <a:solidFill>
-                  <a:schemeClr val="tx1"/>
-                </a:solidFill>
-                <a:latin typeface="+mn-lt"/>
-                <a:ea typeface="+mn-ea"/>
-                <a:cs typeface="+mn-cs"/>
-              </a:rPr>
-              <a:t>self.encoder</a:t>
-            </a:r>
-            <a:r>
-              <a:rPr lang="en-US" sz="1200" kern="1200" dirty="0">
-                <a:solidFill>
-                  <a:schemeClr val="tx1"/>
-                </a:solidFill>
-                <a:latin typeface="+mn-lt"/>
-                <a:ea typeface="+mn-ea"/>
-                <a:cs typeface="+mn-cs"/>
-              </a:rPr>
-              <a:t>(x)</a:t>
-            </a:r>
-            <a:br>
-              <a:rPr lang="en-US" sz="1200" kern="1200" dirty="0">
-                <a:solidFill>
-                  <a:schemeClr val="tx1"/>
-                </a:solidFill>
-                <a:latin typeface="+mn-lt"/>
-                <a:ea typeface="+mn-ea"/>
-                <a:cs typeface="+mn-cs"/>
-              </a:rPr>
-            </a:br>
-            <a:r>
-              <a:rPr lang="en-US" sz="1200" kern="1200" dirty="0">
-                <a:solidFill>
-                  <a:schemeClr val="tx1"/>
-                </a:solidFill>
-                <a:latin typeface="+mn-lt"/>
-                <a:ea typeface="+mn-ea"/>
-                <a:cs typeface="+mn-cs"/>
-              </a:rPr>
-              <a:t>decoded = </a:t>
-            </a:r>
-            <a:r>
-              <a:rPr lang="en-US" sz="1200" kern="1200" dirty="0" err="1">
-                <a:solidFill>
-                  <a:schemeClr val="tx1"/>
-                </a:solidFill>
-                <a:latin typeface="+mn-lt"/>
-                <a:ea typeface="+mn-ea"/>
-                <a:cs typeface="+mn-cs"/>
-              </a:rPr>
-              <a:t>self.decoder</a:t>
-            </a:r>
-            <a:r>
-              <a:rPr lang="en-US" sz="1200" kern="1200" dirty="0">
-                <a:solidFill>
-                  <a:schemeClr val="tx1"/>
-                </a:solidFill>
-                <a:latin typeface="+mn-lt"/>
-                <a:ea typeface="+mn-ea"/>
-                <a:cs typeface="+mn-cs"/>
-              </a:rPr>
-              <a:t>(encoded)</a:t>
-            </a:r>
-          </a:p>
-          <a:p>
-            <a:r>
-              <a:rPr lang="en-US" dirty="0"/>
-              <a:t>First the image is </a:t>
-            </a:r>
-            <a:r>
-              <a:rPr lang="en-US" b="1" dirty="0"/>
-              <a:t>compressed</a:t>
-            </a:r>
-            <a:r>
-              <a:rPr lang="en-US" dirty="0"/>
-              <a:t> </a:t>
-            </a:r>
-          </a:p>
-          <a:p>
-            <a:r>
-              <a:rPr lang="en-US" dirty="0"/>
-              <a:t>Then it is </a:t>
-            </a:r>
-            <a:r>
-              <a:rPr lang="en-US" b="1" dirty="0"/>
-              <a:t>reconstructed</a:t>
-            </a:r>
-            <a:r>
-              <a:rPr lang="en-US" dirty="0"/>
-              <a:t> </a:t>
-            </a:r>
-          </a:p>
-          <a:p>
-            <a:br>
-              <a:rPr lang="en-US" dirty="0"/>
-            </a:br>
-            <a:endParaRPr lang="en-US" dirty="0"/>
-          </a:p>
           <a:p>
             <a:endParaRPr lang="en-US" dirty="0"/>
           </a:p>
@@ -5053,266 +3837,6 @@
           <a:p>
             <a:endParaRPr lang="en-US" dirty="0"/>
           </a:p>
-          <a:p>
-            <a:r>
-              <a:rPr lang="en-US" dirty="0"/>
-              <a:t>Creates an instance of the </a:t>
-            </a:r>
-            <a:r>
-              <a:rPr lang="en-US" b="1" dirty="0"/>
-              <a:t>Autoencoder class</a:t>
-            </a:r>
-            <a:r>
-              <a:rPr lang="en-US" dirty="0"/>
-              <a:t> </a:t>
-            </a:r>
-          </a:p>
-          <a:p>
-            <a:r>
-              <a:rPr lang="en-US" dirty="0"/>
-              <a:t>This includes both: </a:t>
-            </a:r>
-          </a:p>
-          <a:p>
-            <a:pPr lvl="1"/>
-            <a:r>
-              <a:rPr lang="en-US" dirty="0"/>
-              <a:t>the </a:t>
-            </a:r>
-            <a:r>
-              <a:rPr lang="en-US" b="1" dirty="0"/>
-              <a:t>encoder (compression)</a:t>
-            </a:r>
-            <a:r>
-              <a:rPr lang="en-US" dirty="0"/>
-              <a:t> </a:t>
-            </a:r>
-          </a:p>
-          <a:p>
-            <a:pPr lvl="1"/>
-            <a:r>
-              <a:rPr lang="en-US" dirty="0"/>
-              <a:t>the </a:t>
-            </a:r>
-            <a:r>
-              <a:rPr lang="en-US" b="1" dirty="0"/>
-              <a:t>decoder (reconstruction)</a:t>
-            </a:r>
-            <a:r>
-              <a:rPr lang="en-US" dirty="0"/>
-              <a:t> </a:t>
-            </a:r>
-          </a:p>
-          <a:p>
-            <a:r>
-              <a:rPr lang="en-US" dirty="0"/>
-              <a:t>The model is now ready to be trained on data  </a:t>
-            </a:r>
-          </a:p>
-          <a:p>
-            <a:endParaRPr lang="en-US" dirty="0"/>
-          </a:p>
-          <a:p>
-            <a:endParaRPr lang="en-US" dirty="0"/>
-          </a:p>
-          <a:p>
-            <a:pPr rtl="0"/>
-            <a:r>
-              <a:rPr lang="en-US" sz="1200" kern="1200" dirty="0">
-                <a:solidFill>
-                  <a:schemeClr val="tx1"/>
-                </a:solidFill>
-                <a:latin typeface="+mn-lt"/>
-                <a:ea typeface="+mn-ea"/>
-                <a:cs typeface="+mn-cs"/>
-              </a:rPr>
-              <a:t>criterion = </a:t>
-            </a:r>
-            <a:r>
-              <a:rPr lang="en-US" sz="1200" kern="1200" dirty="0" err="1">
-                <a:solidFill>
-                  <a:schemeClr val="tx1"/>
-                </a:solidFill>
-                <a:latin typeface="+mn-lt"/>
-                <a:ea typeface="+mn-ea"/>
-                <a:cs typeface="+mn-cs"/>
-              </a:rPr>
-              <a:t>nn.MSELoss</a:t>
-            </a:r>
-            <a:r>
-              <a:rPr lang="en-US" sz="1200" kern="1200" dirty="0">
-                <a:solidFill>
-                  <a:schemeClr val="tx1"/>
-                </a:solidFill>
-                <a:latin typeface="+mn-lt"/>
-                <a:ea typeface="+mn-ea"/>
-                <a:cs typeface="+mn-cs"/>
-              </a:rPr>
-              <a:t>()- </a:t>
-            </a:r>
-            <a:r>
-              <a:rPr lang="en-US" dirty="0"/>
-              <a:t>measures how different the reconstructed image is from the original image </a:t>
-            </a:r>
-          </a:p>
-          <a:p>
-            <a:r>
-              <a:rPr lang="en-US" dirty="0"/>
-              <a:t>Then it averages the error into a single value </a:t>
-            </a:r>
-          </a:p>
-          <a:p>
-            <a:br>
-              <a:rPr lang="en-US" dirty="0"/>
-            </a:br>
-            <a:endParaRPr lang="en-US" dirty="0"/>
-          </a:p>
-          <a:p>
-            <a:pPr rtl="0"/>
-            <a:r>
-              <a:rPr lang="en-US" sz="1200" kern="1200" dirty="0">
-                <a:solidFill>
-                  <a:schemeClr val="tx1"/>
-                </a:solidFill>
-                <a:latin typeface="+mn-lt"/>
-                <a:ea typeface="+mn-ea"/>
-                <a:cs typeface="+mn-cs"/>
-              </a:rPr>
-              <a:t>optimizer = </a:t>
-            </a:r>
-            <a:r>
-              <a:rPr lang="en-US" sz="1200" kern="1200" dirty="0" err="1">
-                <a:solidFill>
-                  <a:schemeClr val="tx1"/>
-                </a:solidFill>
-                <a:latin typeface="+mn-lt"/>
-                <a:ea typeface="+mn-ea"/>
-                <a:cs typeface="+mn-cs"/>
-              </a:rPr>
-              <a:t>torch.optim.Adam</a:t>
-            </a:r>
-            <a:r>
-              <a:rPr lang="en-US" sz="1200" kern="1200" dirty="0">
-                <a:solidFill>
-                  <a:schemeClr val="tx1"/>
-                </a:solidFill>
-                <a:latin typeface="+mn-lt"/>
-                <a:ea typeface="+mn-ea"/>
-                <a:cs typeface="+mn-cs"/>
-              </a:rPr>
-              <a:t>(: </a:t>
-            </a:r>
-            <a:r>
-              <a:rPr lang="en-US" dirty="0"/>
-              <a:t>The optimizer updates the model’s weights to reduce the loss.</a:t>
-            </a:r>
-          </a:p>
-          <a:p>
-            <a:pPr rtl="0"/>
-            <a:endParaRPr lang="en-US" dirty="0"/>
-          </a:p>
-          <a:p>
-            <a:r>
-              <a:rPr lang="en-US" sz="1200" b="1" kern="1200" dirty="0" err="1">
-                <a:solidFill>
-                  <a:schemeClr val="tx1"/>
-                </a:solidFill>
-                <a:latin typeface="+mn-lt"/>
-                <a:ea typeface="+mn-ea"/>
-                <a:cs typeface="+mn-cs"/>
-              </a:rPr>
-              <a:t>model.parameters</a:t>
-            </a:r>
-            <a:r>
-              <a:rPr lang="en-US" sz="1200" b="1" kern="1200" dirty="0">
-                <a:solidFill>
-                  <a:schemeClr val="tx1"/>
-                </a:solidFill>
-                <a:latin typeface="+mn-lt"/>
-                <a:ea typeface="+mn-ea"/>
-                <a:cs typeface="+mn-cs"/>
-              </a:rPr>
-              <a:t>()</a:t>
-            </a:r>
-            <a:r>
-              <a:rPr lang="en-US" dirty="0"/>
-              <a:t>Tells the optimizer which weights to update </a:t>
-            </a:r>
-          </a:p>
-          <a:p>
-            <a:r>
-              <a:rPr lang="en-US" sz="1200" b="1" kern="1200" dirty="0" err="1">
-                <a:solidFill>
-                  <a:schemeClr val="tx1"/>
-                </a:solidFill>
-                <a:latin typeface="+mn-lt"/>
-                <a:ea typeface="+mn-ea"/>
-                <a:cs typeface="+mn-cs"/>
-              </a:rPr>
-              <a:t>lr</a:t>
-            </a:r>
-            <a:r>
-              <a:rPr lang="en-US" sz="1200" b="1" kern="1200" dirty="0">
-                <a:solidFill>
-                  <a:schemeClr val="tx1"/>
-                </a:solidFill>
-                <a:latin typeface="+mn-lt"/>
-                <a:ea typeface="+mn-ea"/>
-                <a:cs typeface="+mn-cs"/>
-              </a:rPr>
-              <a:t>=1e-3</a:t>
-            </a:r>
-            <a:r>
-              <a:rPr lang="en-US" b="1" dirty="0"/>
-              <a:t> (learning rate)</a:t>
-            </a:r>
-            <a:r>
-              <a:rPr lang="en-US" dirty="0"/>
-              <a:t>Controls how big each update step is </a:t>
-            </a:r>
-          </a:p>
-          <a:p>
-            <a:r>
-              <a:rPr lang="en-US" sz="1200" b="1" kern="1200" dirty="0" err="1">
-                <a:solidFill>
-                  <a:schemeClr val="tx1"/>
-                </a:solidFill>
-                <a:latin typeface="+mn-lt"/>
-                <a:ea typeface="+mn-ea"/>
-                <a:cs typeface="+mn-cs"/>
-              </a:rPr>
-              <a:t>weight_decay</a:t>
-            </a:r>
-            <a:r>
-              <a:rPr lang="en-US" sz="1200" b="1" kern="1200" dirty="0">
-                <a:solidFill>
-                  <a:schemeClr val="tx1"/>
-                </a:solidFill>
-                <a:latin typeface="+mn-lt"/>
-                <a:ea typeface="+mn-ea"/>
-                <a:cs typeface="+mn-cs"/>
-              </a:rPr>
-              <a:t>=1e-5</a:t>
-            </a:r>
-            <a:r>
-              <a:rPr lang="en-US" dirty="0"/>
-              <a:t>Adds </a:t>
-            </a:r>
-            <a:r>
-              <a:rPr lang="en-US" b="1" dirty="0"/>
-              <a:t>regularization</a:t>
-            </a:r>
-            <a:r>
-              <a:rPr lang="en-US" dirty="0"/>
-              <a:t> to help prevent overfitting</a:t>
-            </a:r>
-          </a:p>
-          <a:p>
-            <a:endParaRPr lang="en-US" dirty="0"/>
-          </a:p>
-          <a:p>
-            <a:endParaRPr lang="en-US" dirty="0"/>
-          </a:p>
         </p:txBody>
       </p:sp>
       <p:sp>
@@ -5332,7 +3856,7 @@
           <a:p>
             <a:fld id="{D3AFB998-C619-A84D-A5E8-EB6D3B6283F3}" type="slidenum">
               <a:rPr lang="en-US" smtClean="0"/>
-              <a:t>11</a:t>
+              <a:t>10</a:t>
             </a:fld>
             <a:endParaRPr lang="en-US"/>
           </a:p>
@@ -5341,7 +3865,7 @@
     </p:spTree>
     <p:extLst>
       <p:ext uri="{BB962C8B-B14F-4D97-AF65-F5344CB8AC3E}">
-        <p14:creationId xmlns:p14="http://schemas.microsoft.com/office/powerpoint/2010/main" val="2195678398"/>
+        <p14:creationId xmlns:p14="http://schemas.microsoft.com/office/powerpoint/2010/main" val="1452055958"/>
       </p:ext>
     </p:extLst>
   </p:cSld>
@@ -5395,564 +3919,6 @@
           <a:bodyPr/>
           <a:lstStyle/>
           <a:p>
-            <a:r>
-              <a:rPr lang="en-US" sz="1200" b="1" kern="1200" dirty="0" err="1">
-                <a:solidFill>
-                  <a:schemeClr val="tx1"/>
-                </a:solidFill>
-                <a:latin typeface="+mn-lt"/>
-                <a:ea typeface="+mn-ea"/>
-                <a:cs typeface="+mn-cs"/>
-              </a:rPr>
-              <a:t>num_epochs</a:t>
-            </a:r>
-            <a:r>
-              <a:rPr lang="en-US" dirty="0"/>
-              <a:t> : controls how many times the model goes through the full dataset </a:t>
-            </a:r>
-          </a:p>
-          <a:p>
-            <a:r>
-              <a:rPr lang="en-US" sz="1200" b="1" kern="1200" dirty="0">
-                <a:solidFill>
-                  <a:schemeClr val="tx1"/>
-                </a:solidFill>
-                <a:latin typeface="+mn-lt"/>
-                <a:ea typeface="+mn-ea"/>
-                <a:cs typeface="+mn-cs"/>
-              </a:rPr>
-              <a:t>outputs</a:t>
-            </a:r>
-            <a:r>
-              <a:rPr lang="en-US" dirty="0"/>
-              <a:t> stores results so you can visualize them later </a:t>
-            </a:r>
-          </a:p>
-          <a:p>
-            <a:br>
-              <a:rPr lang="en-US" dirty="0"/>
-            </a:br>
-            <a:endParaRPr lang="en-US" dirty="0"/>
-          </a:p>
-          <a:p>
-            <a:pPr marL="0" marR="0" lvl="0" indent="0" algn="l" defTabSz="914400" rtl="0" eaLnBrk="1" fontAlgn="auto" latinLnBrk="0" hangingPunct="1">
-              <a:lnSpc>
-                <a:spcPct val="100000"/>
-              </a:lnSpc>
-              <a:spcBef>
-                <a:spcPts val="0"/>
-              </a:spcBef>
-              <a:spcAft>
-                <a:spcPts val="0"/>
-              </a:spcAft>
-              <a:buClrTx/>
-              <a:buSzTx/>
-              <a:buFontTx/>
-              <a:buNone/>
-              <a:tabLst/>
-              <a:defRPr/>
-            </a:pPr>
-            <a:r>
-              <a:rPr lang="en-US" sz="1200" kern="1200" dirty="0">
-                <a:solidFill>
-                  <a:schemeClr val="tx1"/>
-                </a:solidFill>
-                <a:latin typeface="+mn-lt"/>
-                <a:ea typeface="+mn-ea"/>
-                <a:cs typeface="+mn-cs"/>
-              </a:rPr>
-              <a:t>for epoch in range(</a:t>
-            </a:r>
-            <a:r>
-              <a:rPr lang="en-US" sz="1200" kern="1200" dirty="0" err="1">
-                <a:solidFill>
-                  <a:schemeClr val="tx1"/>
-                </a:solidFill>
-                <a:latin typeface="+mn-lt"/>
-                <a:ea typeface="+mn-ea"/>
-                <a:cs typeface="+mn-cs"/>
-              </a:rPr>
-              <a:t>num_epochs</a:t>
-            </a:r>
-            <a:r>
-              <a:rPr lang="en-US" sz="1200" kern="1200" dirty="0">
-                <a:solidFill>
-                  <a:schemeClr val="tx1"/>
-                </a:solidFill>
-                <a:latin typeface="+mn-lt"/>
-                <a:ea typeface="+mn-ea"/>
-                <a:cs typeface="+mn-cs"/>
-              </a:rPr>
-              <a:t>): </a:t>
-            </a:r>
-            <a:r>
-              <a:rPr lang="en-US" dirty="0"/>
-              <a:t>The model trains over multiple </a:t>
-            </a:r>
-            <a:r>
-              <a:rPr lang="en-US" b="1" dirty="0"/>
-              <a:t>epochs</a:t>
-            </a:r>
-            <a:r>
-              <a:rPr lang="en-US" dirty="0"/>
-              <a:t> </a:t>
-            </a:r>
-          </a:p>
-          <a:p>
-            <a:pPr marL="0" marR="0" lvl="0" indent="0" algn="l" defTabSz="914400" rtl="0" eaLnBrk="1" fontAlgn="auto" latinLnBrk="0" hangingPunct="1">
-              <a:lnSpc>
-                <a:spcPct val="100000"/>
-              </a:lnSpc>
-              <a:spcBef>
-                <a:spcPts val="0"/>
-              </a:spcBef>
-              <a:spcAft>
-                <a:spcPts val="0"/>
-              </a:spcAft>
-              <a:buClrTx/>
-              <a:buSzTx/>
-              <a:buFontTx/>
-              <a:buNone/>
-              <a:tabLst/>
-              <a:defRPr/>
-            </a:pPr>
-            <a:br>
-              <a:rPr lang="en-US" sz="1200" kern="1200" dirty="0">
-                <a:solidFill>
-                  <a:schemeClr val="tx1"/>
-                </a:solidFill>
-                <a:latin typeface="+mn-lt"/>
-                <a:ea typeface="+mn-ea"/>
-                <a:cs typeface="+mn-cs"/>
-              </a:rPr>
-            </a:br>
-            <a:r>
-              <a:rPr lang="en-US" sz="1200" kern="1200" dirty="0">
-                <a:solidFill>
-                  <a:schemeClr val="tx1"/>
-                </a:solidFill>
-                <a:latin typeface="+mn-lt"/>
-                <a:ea typeface="+mn-ea"/>
-                <a:cs typeface="+mn-cs"/>
-              </a:rPr>
-              <a:t>    for (</a:t>
-            </a:r>
-            <a:r>
-              <a:rPr lang="en-US" sz="1200" kern="1200" dirty="0" err="1">
-                <a:solidFill>
-                  <a:schemeClr val="tx1"/>
-                </a:solidFill>
-                <a:latin typeface="+mn-lt"/>
-                <a:ea typeface="+mn-ea"/>
-                <a:cs typeface="+mn-cs"/>
-              </a:rPr>
-              <a:t>img</a:t>
-            </a:r>
-            <a:r>
-              <a:rPr lang="en-US" sz="1200" kern="1200" dirty="0">
-                <a:solidFill>
-                  <a:schemeClr val="tx1"/>
-                </a:solidFill>
-                <a:latin typeface="+mn-lt"/>
-                <a:ea typeface="+mn-ea"/>
-                <a:cs typeface="+mn-cs"/>
-              </a:rPr>
-              <a:t>, _) in </a:t>
-            </a:r>
-            <a:r>
-              <a:rPr lang="en-US" sz="1200" kern="1200" dirty="0" err="1">
-                <a:solidFill>
-                  <a:schemeClr val="tx1"/>
-                </a:solidFill>
-                <a:latin typeface="+mn-lt"/>
-                <a:ea typeface="+mn-ea"/>
-                <a:cs typeface="+mn-cs"/>
-              </a:rPr>
-              <a:t>data_loader:</a:t>
-            </a:r>
-            <a:r>
-              <a:rPr lang="en-US" dirty="0" err="1"/>
-              <a:t>Each</a:t>
-            </a:r>
-            <a:r>
-              <a:rPr lang="en-US" dirty="0"/>
-              <a:t> epoch loops through the dataset in </a:t>
-            </a:r>
-            <a:r>
-              <a:rPr lang="en-US" b="1" dirty="0"/>
-              <a:t>batches</a:t>
-            </a:r>
-            <a:r>
-              <a:rPr lang="en-US" dirty="0"/>
-              <a:t> </a:t>
-            </a:r>
-          </a:p>
-          <a:p>
-            <a:pPr rtl="0"/>
-            <a:endParaRPr lang="en-US" sz="1200" kern="1200" dirty="0">
-              <a:solidFill>
-                <a:schemeClr val="tx1"/>
-              </a:solidFill>
-              <a:latin typeface="+mn-lt"/>
-              <a:ea typeface="+mn-ea"/>
-              <a:cs typeface="+mn-cs"/>
-            </a:endParaRPr>
-          </a:p>
-          <a:p>
-            <a:br>
-              <a:rPr lang="en-US" dirty="0"/>
-            </a:br>
-            <a:endParaRPr lang="en-US" dirty="0"/>
-          </a:p>
-          <a:p>
-            <a:br>
-              <a:rPr lang="en-US" dirty="0"/>
-            </a:br>
-            <a:endParaRPr lang="en-US" dirty="0"/>
-          </a:p>
-          <a:p>
-            <a:pPr rtl="0"/>
-            <a:r>
-              <a:rPr lang="en-US" sz="1200" kern="1200" dirty="0">
-                <a:solidFill>
-                  <a:schemeClr val="tx1"/>
-                </a:solidFill>
-                <a:latin typeface="+mn-lt"/>
-                <a:ea typeface="+mn-ea"/>
-                <a:cs typeface="+mn-cs"/>
-              </a:rPr>
-              <a:t>recon = model(</a:t>
-            </a:r>
-            <a:r>
-              <a:rPr lang="en-US" sz="1200" kern="1200" dirty="0" err="1">
-                <a:solidFill>
-                  <a:schemeClr val="tx1"/>
-                </a:solidFill>
-                <a:latin typeface="+mn-lt"/>
-                <a:ea typeface="+mn-ea"/>
-                <a:cs typeface="+mn-cs"/>
-              </a:rPr>
-              <a:t>img</a:t>
-            </a:r>
-            <a:r>
-              <a:rPr lang="en-US" sz="1200" kern="1200" dirty="0">
-                <a:solidFill>
-                  <a:schemeClr val="tx1"/>
-                </a:solidFill>
-                <a:latin typeface="+mn-lt"/>
-                <a:ea typeface="+mn-ea"/>
-                <a:cs typeface="+mn-cs"/>
-              </a:rPr>
-              <a:t>)</a:t>
-            </a:r>
-          </a:p>
-          <a:p>
-            <a:r>
-              <a:rPr lang="en-US" dirty="0"/>
-              <a:t>The image is passed through: </a:t>
-            </a:r>
-            <a:r>
-              <a:rPr lang="en-US" b="1" dirty="0"/>
-              <a:t>encoder </a:t>
-            </a:r>
-            <a:r>
-              <a:rPr lang="en-US" b="0" dirty="0"/>
-              <a:t>, </a:t>
-            </a:r>
-            <a:r>
-              <a:rPr lang="en-US" b="1" dirty="0"/>
-              <a:t>decoder </a:t>
-            </a:r>
-            <a:endParaRPr lang="en-US" dirty="0"/>
-          </a:p>
-          <a:p>
-            <a:r>
-              <a:rPr lang="en-US" dirty="0"/>
-              <a:t>Output is the reconstructed image </a:t>
-            </a:r>
-          </a:p>
-          <a:p>
-            <a:br>
-              <a:rPr lang="en-US" dirty="0"/>
-            </a:br>
-            <a:endParaRPr lang="en-US" b="1" dirty="0"/>
-          </a:p>
-          <a:p>
-            <a:pPr rtl="0"/>
-            <a:r>
-              <a:rPr lang="en-US" sz="1200" kern="1200" dirty="0">
-                <a:solidFill>
-                  <a:schemeClr val="tx1"/>
-                </a:solidFill>
-                <a:latin typeface="+mn-lt"/>
-                <a:ea typeface="+mn-ea"/>
-                <a:cs typeface="+mn-cs"/>
-              </a:rPr>
-              <a:t>loss = criterion(recon, </a:t>
-            </a:r>
-            <a:r>
-              <a:rPr lang="en-US" sz="1200" kern="1200" dirty="0" err="1">
-                <a:solidFill>
-                  <a:schemeClr val="tx1"/>
-                </a:solidFill>
-                <a:latin typeface="+mn-lt"/>
-                <a:ea typeface="+mn-ea"/>
-                <a:cs typeface="+mn-cs"/>
-              </a:rPr>
-              <a:t>img</a:t>
-            </a:r>
-            <a:r>
-              <a:rPr lang="en-US" sz="1200" kern="1200" dirty="0">
-                <a:solidFill>
-                  <a:schemeClr val="tx1"/>
-                </a:solidFill>
-                <a:latin typeface="+mn-lt"/>
-                <a:ea typeface="+mn-ea"/>
-                <a:cs typeface="+mn-cs"/>
-              </a:rPr>
-              <a:t>)</a:t>
-            </a:r>
-          </a:p>
-          <a:p>
-            <a:r>
-              <a:rPr lang="en-US" dirty="0"/>
-              <a:t>Compares: </a:t>
-            </a:r>
-            <a:r>
-              <a:rPr lang="en-US" b="1" dirty="0"/>
-              <a:t>original image, reconstructed image, </a:t>
-            </a:r>
-            <a:r>
-              <a:rPr lang="en-US" dirty="0"/>
-              <a:t>Uses </a:t>
-            </a:r>
-            <a:r>
-              <a:rPr lang="en-US" b="1" dirty="0"/>
-              <a:t>Mean Squared Error (MSE)</a:t>
-            </a:r>
-            <a:r>
-              <a:rPr lang="en-US" dirty="0"/>
-              <a:t> </a:t>
-            </a:r>
-          </a:p>
-          <a:p>
-            <a:endParaRPr lang="en-US" dirty="0"/>
-          </a:p>
-          <a:p>
-            <a:br>
-              <a:rPr lang="en-US" dirty="0"/>
-            </a:br>
-            <a:endParaRPr lang="en-US" dirty="0"/>
-          </a:p>
-          <a:p>
-            <a:r>
-              <a:rPr lang="en-US" sz="1200" b="1" kern="1200" dirty="0" err="1">
-                <a:solidFill>
-                  <a:schemeClr val="tx1"/>
-                </a:solidFill>
-                <a:latin typeface="+mn-lt"/>
-                <a:ea typeface="+mn-ea"/>
-                <a:cs typeface="+mn-cs"/>
-              </a:rPr>
-              <a:t>zero_grad</a:t>
-            </a:r>
-            <a:r>
-              <a:rPr lang="en-US" sz="1200" b="1" kern="1200" dirty="0">
-                <a:solidFill>
-                  <a:schemeClr val="tx1"/>
-                </a:solidFill>
-                <a:latin typeface="+mn-lt"/>
-                <a:ea typeface="+mn-ea"/>
-                <a:cs typeface="+mn-cs"/>
-              </a:rPr>
-              <a:t>()</a:t>
-            </a:r>
-            <a:r>
-              <a:rPr lang="en-US" dirty="0"/>
-              <a:t> → clears old gradients </a:t>
-            </a:r>
-          </a:p>
-          <a:p>
-            <a:r>
-              <a:rPr lang="en-US" sz="1200" b="1" kern="1200" dirty="0">
-                <a:solidFill>
-                  <a:schemeClr val="tx1"/>
-                </a:solidFill>
-                <a:latin typeface="+mn-lt"/>
-                <a:ea typeface="+mn-ea"/>
-                <a:cs typeface="+mn-cs"/>
-              </a:rPr>
-              <a:t>backward()</a:t>
-            </a:r>
-            <a:r>
-              <a:rPr lang="en-US" dirty="0"/>
-              <a:t> → calculates gradients (how to improve the model) </a:t>
-            </a:r>
-          </a:p>
-          <a:p>
-            <a:r>
-              <a:rPr lang="en-US" sz="1200" b="1" kern="1200" dirty="0">
-                <a:solidFill>
-                  <a:schemeClr val="tx1"/>
-                </a:solidFill>
-                <a:latin typeface="+mn-lt"/>
-                <a:ea typeface="+mn-ea"/>
-                <a:cs typeface="+mn-cs"/>
-              </a:rPr>
-              <a:t>step()</a:t>
-            </a:r>
-            <a:r>
-              <a:rPr lang="en-US" dirty="0"/>
-              <a:t> → updates model weights </a:t>
-            </a:r>
-          </a:p>
-          <a:p>
-            <a:br>
-              <a:rPr lang="en-US" dirty="0"/>
-            </a:br>
-            <a:endParaRPr lang="en-US" dirty="0"/>
-          </a:p>
-          <a:p>
-            <a:pPr rtl="0"/>
-            <a:r>
-              <a:rPr lang="en-US" sz="1200" kern="1200" dirty="0">
-                <a:solidFill>
-                  <a:schemeClr val="tx1"/>
-                </a:solidFill>
-                <a:latin typeface="+mn-lt"/>
-                <a:ea typeface="+mn-ea"/>
-                <a:cs typeface="+mn-cs"/>
-              </a:rPr>
-              <a:t>print(</a:t>
-            </a:r>
-            <a:r>
-              <a:rPr lang="en-US" sz="1200" kern="1200" dirty="0" err="1">
-                <a:solidFill>
-                  <a:schemeClr val="tx1"/>
-                </a:solidFill>
-                <a:latin typeface="+mn-lt"/>
-                <a:ea typeface="+mn-ea"/>
-                <a:cs typeface="+mn-cs"/>
-              </a:rPr>
-              <a:t>f'Epoch</a:t>
-            </a:r>
-            <a:r>
-              <a:rPr lang="en-US" sz="1200" kern="1200" dirty="0">
-                <a:solidFill>
-                  <a:schemeClr val="tx1"/>
-                </a:solidFill>
-                <a:latin typeface="+mn-lt"/>
-                <a:ea typeface="+mn-ea"/>
-                <a:cs typeface="+mn-cs"/>
-              </a:rPr>
-              <a:t>:{epoch+1}, Loss:{</a:t>
-            </a:r>
-            <a:r>
-              <a:rPr lang="en-US" sz="1200" kern="1200" dirty="0" err="1">
-                <a:solidFill>
-                  <a:schemeClr val="tx1"/>
-                </a:solidFill>
-                <a:latin typeface="+mn-lt"/>
-                <a:ea typeface="+mn-ea"/>
-                <a:cs typeface="+mn-cs"/>
-              </a:rPr>
-              <a:t>loss.item</a:t>
-            </a:r>
-            <a:r>
-              <a:rPr lang="en-US" sz="1200" kern="1200" dirty="0">
-                <a:solidFill>
-                  <a:schemeClr val="tx1"/>
-                </a:solidFill>
-                <a:latin typeface="+mn-lt"/>
-                <a:ea typeface="+mn-ea"/>
-                <a:cs typeface="+mn-cs"/>
-              </a:rPr>
-              <a:t>():.4f}')</a:t>
-            </a:r>
-          </a:p>
-          <a:p>
-            <a:r>
-              <a:rPr lang="en-US" dirty="0"/>
-              <a:t>Prints training progress </a:t>
-            </a:r>
-          </a:p>
-          <a:p>
-            <a:r>
-              <a:rPr lang="en-US" dirty="0"/>
-              <a:t>Shows how well the model is learning each epoch </a:t>
-            </a:r>
-          </a:p>
-          <a:p>
-            <a:br>
-              <a:rPr lang="en-US" dirty="0"/>
-            </a:br>
-            <a:endParaRPr lang="en-US" dirty="0"/>
-          </a:p>
-          <a:p>
-            <a:pPr rtl="0"/>
-            <a:r>
-              <a:rPr lang="en-US" sz="1200" kern="1200" dirty="0" err="1">
-                <a:solidFill>
-                  <a:schemeClr val="tx1"/>
-                </a:solidFill>
-                <a:latin typeface="+mn-lt"/>
-                <a:ea typeface="+mn-ea"/>
-                <a:cs typeface="+mn-cs"/>
-              </a:rPr>
-              <a:t>outputs.append</a:t>
-            </a:r>
-            <a:r>
-              <a:rPr lang="en-US" sz="1200" kern="1200" dirty="0">
-                <a:solidFill>
-                  <a:schemeClr val="tx1"/>
-                </a:solidFill>
-                <a:latin typeface="+mn-lt"/>
-                <a:ea typeface="+mn-ea"/>
-                <a:cs typeface="+mn-cs"/>
-              </a:rPr>
-              <a:t>((epoch, </a:t>
-            </a:r>
-            <a:r>
-              <a:rPr lang="en-US" sz="1200" kern="1200" dirty="0" err="1">
-                <a:solidFill>
-                  <a:schemeClr val="tx1"/>
-                </a:solidFill>
-                <a:latin typeface="+mn-lt"/>
-                <a:ea typeface="+mn-ea"/>
-                <a:cs typeface="+mn-cs"/>
-              </a:rPr>
-              <a:t>img</a:t>
-            </a:r>
-            <a:r>
-              <a:rPr lang="en-US" sz="1200" kern="1200" dirty="0">
-                <a:solidFill>
-                  <a:schemeClr val="tx1"/>
-                </a:solidFill>
-                <a:latin typeface="+mn-lt"/>
-                <a:ea typeface="+mn-ea"/>
-                <a:cs typeface="+mn-cs"/>
-              </a:rPr>
-              <a:t>, recon))</a:t>
-            </a:r>
-          </a:p>
-          <a:p>
-            <a:r>
-              <a:rPr lang="en-US" dirty="0"/>
-              <a:t>Stores: epoch number original images reconstructed images </a:t>
-            </a:r>
-          </a:p>
-          <a:p>
-            <a:r>
-              <a:rPr lang="en-US" dirty="0"/>
-              <a:t>Used later for </a:t>
-            </a:r>
-            <a:r>
-              <a:rPr lang="en-US" b="1" dirty="0"/>
-              <a:t>visual comparison of results</a:t>
-            </a:r>
-            <a:endParaRPr lang="en-US" dirty="0"/>
-          </a:p>
-          <a:p>
             <a:endParaRPr lang="en-US" dirty="0"/>
           </a:p>
         </p:txBody>
@@ -5974,7 +3940,7 @@
           <a:p>
             <a:fld id="{D3AFB998-C619-A84D-A5E8-EB6D3B6283F3}" type="slidenum">
               <a:rPr lang="en-US" smtClean="0"/>
-              <a:t>12</a:t>
+              <a:t>11</a:t>
             </a:fld>
             <a:endParaRPr lang="en-US"/>
           </a:p>
@@ -5983,7 +3949,7 @@
     </p:spTree>
     <p:extLst>
       <p:ext uri="{BB962C8B-B14F-4D97-AF65-F5344CB8AC3E}">
-        <p14:creationId xmlns:p14="http://schemas.microsoft.com/office/powerpoint/2010/main" val="3721435502"/>
+        <p14:creationId xmlns:p14="http://schemas.microsoft.com/office/powerpoint/2010/main" val="2195678398"/>
       </p:ext>
     </p:extLst>
   </p:cSld>
@@ -6037,352 +4003,89 @@
           <a:bodyPr/>
           <a:lstStyle/>
           <a:p>
-            <a:r>
-              <a:rPr lang="en-US" dirty="0"/>
-              <a:t> for k in range(0, </a:t>
-            </a:r>
-            <a:r>
-              <a:rPr lang="en-US" dirty="0" err="1"/>
-              <a:t>num_epochs</a:t>
-            </a:r>
-            <a:r>
-              <a:rPr lang="en-US" dirty="0"/>
-              <a:t>, 4):Selects every </a:t>
-            </a:r>
-            <a:r>
-              <a:rPr lang="en-US" b="1" dirty="0"/>
-              <a:t>4th epoch</a:t>
-            </a:r>
-            <a:r>
-              <a:rPr lang="en-US" dirty="0"/>
-              <a:t> instead of showing all of them</a:t>
-            </a:r>
-          </a:p>
-          <a:p>
-            <a:r>
-              <a:rPr lang="en-US" dirty="0" err="1"/>
-              <a:t>plt.figure</a:t>
-            </a:r>
-            <a:r>
-              <a:rPr lang="en-US" dirty="0"/>
-              <a:t>(</a:t>
-            </a:r>
-            <a:r>
-              <a:rPr lang="en-US" dirty="0" err="1"/>
-              <a:t>figsize</a:t>
-            </a:r>
-            <a:r>
-              <a:rPr lang="en-US" dirty="0"/>
-              <a:t> : Creates a figure for plotting images </a:t>
-            </a:r>
-          </a:p>
-          <a:p>
             <a:endParaRPr lang="en-US" dirty="0"/>
           </a:p>
+        </p:txBody>
+      </p:sp>
+      <p:sp>
+        <p:nvSpPr>
+          <p:cNvPr id="4" name="Slide Number Placeholder 3"/>
+          <p:cNvSpPr>
+            <a:spLocks noGrp="1"/>
+          </p:cNvSpPr>
+          <p:nvPr>
+            <p:ph type="sldNum" sz="quarter" idx="5"/>
+          </p:nvPr>
+        </p:nvSpPr>
+        <p:spPr/>
+        <p:txBody>
+          <a:bodyPr/>
+          <a:lstStyle/>
           <a:p>
-            <a:pPr marL="0" marR="0" lvl="0" indent="0" algn="l" defTabSz="914400" rtl="0" eaLnBrk="1" fontAlgn="auto" latinLnBrk="0" hangingPunct="1">
-              <a:lnSpc>
-                <a:spcPct val="100000"/>
-              </a:lnSpc>
-              <a:spcBef>
-                <a:spcPts val="0"/>
-              </a:spcBef>
-              <a:spcAft>
-                <a:spcPts val="0"/>
-              </a:spcAft>
-              <a:buClrTx/>
-              <a:buSzTx/>
-              <a:buFontTx/>
-              <a:buNone/>
-              <a:tabLst/>
-              <a:defRPr/>
-            </a:pPr>
-            <a:r>
-              <a:rPr lang="en-US" dirty="0"/>
-              <a:t>Retrieves stored results from training:</a:t>
-            </a:r>
+            <a:fld id="{D3AFB998-C619-A84D-A5E8-EB6D3B6283F3}" type="slidenum">
+              <a:rPr lang="en-US" smtClean="0"/>
+              <a:t>12</a:t>
+            </a:fld>
+            <a:endParaRPr lang="en-US"/>
           </a:p>
-          <a:p>
-            <a:r>
-              <a:rPr lang="en-US" dirty="0" err="1"/>
-              <a:t>imgs</a:t>
-            </a:r>
-            <a:r>
-              <a:rPr lang="en-US" dirty="0"/>
-              <a:t> = original images</a:t>
-            </a:r>
-          </a:p>
-          <a:p>
-            <a:r>
-              <a:rPr lang="en-US" dirty="0"/>
-              <a:t>Recon= reconstructed images </a:t>
-            </a:r>
-          </a:p>
-          <a:p>
-            <a:endParaRPr lang="en-US" dirty="0"/>
-          </a:p>
-          <a:p>
-            <a:r>
-              <a:rPr lang="en-US" dirty="0"/>
-              <a:t>for </a:t>
-            </a:r>
-            <a:r>
-              <a:rPr lang="en-US" dirty="0" err="1"/>
-              <a:t>i</a:t>
-            </a:r>
-            <a:r>
-              <a:rPr lang="en-US" dirty="0"/>
-              <a:t>, item in enumerate(</a:t>
-            </a:r>
-            <a:r>
-              <a:rPr lang="en-US" dirty="0" err="1"/>
-              <a:t>imgs</a:t>
-            </a:r>
-            <a:r>
-              <a:rPr lang="en-US" dirty="0"/>
-              <a:t>):</a:t>
-            </a:r>
-            <a:br>
-              <a:rPr lang="en-US" dirty="0"/>
-            </a:br>
-            <a:r>
-              <a:rPr lang="en-US" dirty="0"/>
-              <a:t>if </a:t>
-            </a:r>
-            <a:r>
-              <a:rPr lang="en-US" dirty="0" err="1"/>
-              <a:t>i</a:t>
-            </a:r>
-            <a:r>
-              <a:rPr lang="en-US" dirty="0"/>
-              <a:t> &gt;= 9: break</a:t>
-            </a:r>
-            <a:br>
-              <a:rPr lang="en-US" dirty="0"/>
-            </a:br>
-            <a:r>
-              <a:rPr lang="en-US" dirty="0" err="1"/>
-              <a:t>plt.subplot</a:t>
-            </a:r>
-            <a:r>
-              <a:rPr lang="en-US" dirty="0"/>
-              <a:t>(2, 9, i+1)</a:t>
-            </a:r>
-            <a:br>
-              <a:rPr lang="en-US" dirty="0"/>
-            </a:br>
-            <a:r>
-              <a:rPr lang="en-US" dirty="0" err="1"/>
-              <a:t>plt.imshow</a:t>
-            </a:r>
-            <a:r>
-              <a:rPr lang="en-US" dirty="0"/>
-              <a:t>(item[0])</a:t>
-            </a:r>
-          </a:p>
-          <a:p>
-            <a:endParaRPr lang="en-US" dirty="0"/>
-          </a:p>
-          <a:p>
-            <a:r>
-              <a:rPr lang="en-US" dirty="0"/>
-              <a:t>Plots the first </a:t>
-            </a:r>
-            <a:r>
-              <a:rPr lang="en-US" b="1" dirty="0"/>
-              <a:t>9 original images</a:t>
-            </a:r>
-            <a:r>
-              <a:rPr lang="en-US" dirty="0"/>
-              <a:t> Places them in the </a:t>
-            </a:r>
-            <a:r>
-              <a:rPr lang="en-US" b="1" dirty="0"/>
-              <a:t>top row</a:t>
-            </a:r>
-          </a:p>
-          <a:p>
-            <a:endParaRPr lang="en-US" b="1" dirty="0"/>
-          </a:p>
-          <a:p>
-            <a:endParaRPr lang="en-US" b="1" dirty="0"/>
-          </a:p>
-          <a:p>
-            <a:pPr rtl="0"/>
-            <a:r>
-              <a:rPr lang="en-US" sz="1200" kern="1200" dirty="0">
-                <a:solidFill>
-                  <a:schemeClr val="tx1"/>
-                </a:solidFill>
-                <a:latin typeface="+mn-lt"/>
-                <a:ea typeface="+mn-ea"/>
-                <a:cs typeface="+mn-cs"/>
-              </a:rPr>
-              <a:t>for </a:t>
-            </a:r>
-            <a:r>
-              <a:rPr lang="en-US" sz="1200" kern="1200" dirty="0" err="1">
-                <a:solidFill>
-                  <a:schemeClr val="tx1"/>
-                </a:solidFill>
-                <a:latin typeface="+mn-lt"/>
-                <a:ea typeface="+mn-ea"/>
-                <a:cs typeface="+mn-cs"/>
-              </a:rPr>
-              <a:t>i</a:t>
-            </a:r>
-            <a:r>
-              <a:rPr lang="en-US" sz="1200" kern="1200" dirty="0">
-                <a:solidFill>
-                  <a:schemeClr val="tx1"/>
-                </a:solidFill>
-                <a:latin typeface="+mn-lt"/>
-                <a:ea typeface="+mn-ea"/>
-                <a:cs typeface="+mn-cs"/>
-              </a:rPr>
-              <a:t>, item in enumerate(recon):</a:t>
-            </a:r>
-            <a:br>
-              <a:rPr lang="en-US" sz="1200" kern="1200" dirty="0">
-                <a:solidFill>
-                  <a:schemeClr val="tx1"/>
-                </a:solidFill>
-                <a:latin typeface="+mn-lt"/>
-                <a:ea typeface="+mn-ea"/>
-                <a:cs typeface="+mn-cs"/>
-              </a:rPr>
-            </a:br>
-            <a:r>
-              <a:rPr lang="en-US" sz="1200" kern="1200" dirty="0">
-                <a:solidFill>
-                  <a:schemeClr val="tx1"/>
-                </a:solidFill>
-                <a:latin typeface="+mn-lt"/>
-                <a:ea typeface="+mn-ea"/>
-                <a:cs typeface="+mn-cs"/>
-              </a:rPr>
-              <a:t>    if </a:t>
-            </a:r>
-            <a:r>
-              <a:rPr lang="en-US" sz="1200" kern="1200" dirty="0" err="1">
-                <a:solidFill>
-                  <a:schemeClr val="tx1"/>
-                </a:solidFill>
-                <a:latin typeface="+mn-lt"/>
-                <a:ea typeface="+mn-ea"/>
-                <a:cs typeface="+mn-cs"/>
-              </a:rPr>
-              <a:t>i</a:t>
-            </a:r>
-            <a:r>
-              <a:rPr lang="en-US" sz="1200" kern="1200" dirty="0">
-                <a:solidFill>
-                  <a:schemeClr val="tx1"/>
-                </a:solidFill>
-                <a:latin typeface="+mn-lt"/>
-                <a:ea typeface="+mn-ea"/>
-                <a:cs typeface="+mn-cs"/>
-              </a:rPr>
-              <a:t> &gt;= 9: break</a:t>
-            </a:r>
-            <a:br>
-              <a:rPr lang="en-US" sz="1200" kern="1200" dirty="0">
-                <a:solidFill>
-                  <a:schemeClr val="tx1"/>
-                </a:solidFill>
-                <a:latin typeface="+mn-lt"/>
-                <a:ea typeface="+mn-ea"/>
-                <a:cs typeface="+mn-cs"/>
-              </a:rPr>
-            </a:br>
-            <a:r>
-              <a:rPr lang="en-US" sz="1200" kern="1200" dirty="0">
-                <a:solidFill>
-                  <a:schemeClr val="tx1"/>
-                </a:solidFill>
-                <a:latin typeface="+mn-lt"/>
-                <a:ea typeface="+mn-ea"/>
-                <a:cs typeface="+mn-cs"/>
-              </a:rPr>
-              <a:t>    </a:t>
-            </a:r>
-            <a:r>
-              <a:rPr lang="en-US" sz="1200" kern="1200" dirty="0" err="1">
-                <a:solidFill>
-                  <a:schemeClr val="tx1"/>
-                </a:solidFill>
-                <a:latin typeface="+mn-lt"/>
-                <a:ea typeface="+mn-ea"/>
-                <a:cs typeface="+mn-cs"/>
-              </a:rPr>
-              <a:t>plt.subplot</a:t>
-            </a:r>
-            <a:r>
-              <a:rPr lang="en-US" sz="1200" kern="1200" dirty="0">
-                <a:solidFill>
-                  <a:schemeClr val="tx1"/>
-                </a:solidFill>
-                <a:latin typeface="+mn-lt"/>
-                <a:ea typeface="+mn-ea"/>
-                <a:cs typeface="+mn-cs"/>
-              </a:rPr>
-              <a:t>(2, 9, 9+i+1)</a:t>
-            </a:r>
-            <a:br>
-              <a:rPr lang="en-US" sz="1200" kern="1200" dirty="0">
-                <a:solidFill>
-                  <a:schemeClr val="tx1"/>
-                </a:solidFill>
-                <a:latin typeface="+mn-lt"/>
-                <a:ea typeface="+mn-ea"/>
-                <a:cs typeface="+mn-cs"/>
-              </a:rPr>
-            </a:br>
-            <a:r>
-              <a:rPr lang="en-US" sz="1200" kern="1200" dirty="0">
-                <a:solidFill>
-                  <a:schemeClr val="tx1"/>
-                </a:solidFill>
-                <a:latin typeface="+mn-lt"/>
-                <a:ea typeface="+mn-ea"/>
-                <a:cs typeface="+mn-cs"/>
-              </a:rPr>
-              <a:t>    </a:t>
-            </a:r>
-            <a:r>
-              <a:rPr lang="en-US" sz="1200" kern="1200" dirty="0" err="1">
-                <a:solidFill>
-                  <a:schemeClr val="tx1"/>
-                </a:solidFill>
-                <a:latin typeface="+mn-lt"/>
-                <a:ea typeface="+mn-ea"/>
-                <a:cs typeface="+mn-cs"/>
-              </a:rPr>
-              <a:t>plt.imshow</a:t>
-            </a:r>
-            <a:r>
-              <a:rPr lang="en-US" sz="1200" kern="1200" dirty="0">
-                <a:solidFill>
-                  <a:schemeClr val="tx1"/>
-                </a:solidFill>
-                <a:latin typeface="+mn-lt"/>
-                <a:ea typeface="+mn-ea"/>
-                <a:cs typeface="+mn-cs"/>
-              </a:rPr>
-              <a:t>(item[0])</a:t>
-            </a:r>
-          </a:p>
-          <a:p>
-            <a:r>
-              <a:rPr lang="en-US" dirty="0"/>
-              <a:t>Plots the first </a:t>
-            </a:r>
-            <a:r>
-              <a:rPr lang="en-US" b="1" dirty="0"/>
-              <a:t>9 reconstructed images</a:t>
-            </a:r>
-            <a:endParaRPr lang="en-US" dirty="0"/>
-          </a:p>
+        </p:txBody>
+      </p:sp>
+    </p:spTree>
+    <p:extLst>
+      <p:ext uri="{BB962C8B-B14F-4D97-AF65-F5344CB8AC3E}">
+        <p14:creationId xmlns:p14="http://schemas.microsoft.com/office/powerpoint/2010/main" val="3721435502"/>
+      </p:ext>
+    </p:extLst>
+  </p:cSld>
+  <p:clrMapOvr>
+    <a:masterClrMapping/>
+  </p:clrMapOvr>
+</p:notes>
+</file>
+
+<file path=ppt/notesSlides/notesSlide9.xml><?xml version="1.0" encoding="utf-8"?>
+<p:notes xmlns:a="http://schemas.openxmlformats.org/drawingml/2006/main" xmlns:r="http://schemas.openxmlformats.org/officeDocument/2006/relationships" xmlns:p="http://schemas.openxmlformats.org/presentationml/2006/main">
+  <p:cSld>
+    <p:spTree>
+      <p:nvGrpSpPr>
+        <p:cNvPr id="1" name=""/>
+        <p:cNvGrpSpPr/>
+        <p:nvPr/>
+      </p:nvGrpSpPr>
+      <p:grpSpPr>
+        <a:xfrm>
+          <a:off x="0" y="0"/>
+          <a:ext cx="0" cy="0"/>
+          <a:chOff x="0" y="0"/>
+          <a:chExt cx="0" cy="0"/>
+        </a:xfrm>
+      </p:grpSpPr>
+      <p:sp>
+        <p:nvSpPr>
+          <p:cNvPr id="2" name="Slide Image Placeholder 1"/>
+          <p:cNvSpPr>
+            <a:spLocks noGrp="1" noRot="1" noChangeAspect="1"/>
+          </p:cNvSpPr>
+          <p:nvPr>
+            <p:ph type="sldImg"/>
+          </p:nvPr>
+        </p:nvSpPr>
+        <p:spPr/>
+      </p:sp>
+      <p:sp>
+        <p:nvSpPr>
+          <p:cNvPr id="3" name="Notes Placeholder 2"/>
+          <p:cNvSpPr>
+            <a:spLocks noGrp="1"/>
+          </p:cNvSpPr>
+          <p:nvPr>
+            <p:ph type="body" idx="1"/>
+          </p:nvPr>
+        </p:nvSpPr>
+        <p:spPr/>
+        <p:txBody>
+          <a:bodyPr/>
+          <a:lstStyle/>
           <a:p>
             <a:endParaRPr lang="en-US" dirty="0"/>
           </a:p>
@@ -6813,7 +4516,6 @@
               <a:rPr lang="en-US"/>
               <a:t>Click to edit Master title style</a:t>
             </a:r>
-            <a:endParaRPr lang="en-US" dirty="0"/>
           </a:p>
         </p:txBody>
       </p:sp>
@@ -6883,7 +4585,7 @@
           </a:lstStyle>
           <a:p>
             <a:r>
-              <a:rPr lang="en-US" dirty="0"/>
+              <a:rPr lang="en-US"/>
               <a:t>Click to edit Master subtitle style</a:t>
             </a:r>
           </a:p>
@@ -6912,9 +4614,9 @@
           <a:p>
             <a:fld id="{72345051-2045-45DA-935E-2E3CA1A69ADC}" type="datetimeFigureOut">
               <a:rPr lang="en-US" smtClean="0"/>
-              <a:t>5/5/26</a:t>
+              <a:t>5/6/26</a:t>
             </a:fld>
-            <a:endParaRPr lang="en-US" dirty="0"/>
+            <a:endParaRPr lang="en-US"/>
           </a:p>
         </p:txBody>
       </p:sp>
@@ -7053,35 +4755,35 @@
           <a:p>
             <a:pPr lvl="0"/>
             <a:r>
-              <a:rPr lang="en-US" dirty="0"/>
+              <a:rPr lang="en-US"/>
               <a:t>Click to edit Master text styles</a:t>
             </a:r>
           </a:p>
           <a:p>
             <a:pPr lvl="1"/>
             <a:r>
-              <a:rPr lang="en-US" dirty="0"/>
+              <a:rPr lang="en-US"/>
               <a:t>Second level</a:t>
             </a:r>
           </a:p>
           <a:p>
             <a:pPr lvl="2"/>
             <a:r>
-              <a:rPr lang="en-US" dirty="0"/>
+              <a:rPr lang="en-US"/>
               <a:t>Third level</a:t>
             </a:r>
           </a:p>
           <a:p>
             <a:pPr lvl="3"/>
             <a:r>
-              <a:rPr lang="en-US" dirty="0"/>
+              <a:rPr lang="en-US"/>
               <a:t>Fourth level</a:t>
             </a:r>
           </a:p>
           <a:p>
             <a:pPr lvl="4"/>
             <a:r>
-              <a:rPr lang="en-US" dirty="0"/>
+              <a:rPr lang="en-US"/>
               <a:t>Fifth level</a:t>
             </a:r>
           </a:p>
@@ -7110,7 +4812,7 @@
           <a:p>
             <a:fld id="{72345051-2045-45DA-935E-2E3CA1A69ADC}" type="datetimeFigureOut">
               <a:rPr lang="en-US" smtClean="0"/>
-              <a:t>5/5/26</a:t>
+              <a:t>5/6/26</a:t>
             </a:fld>
             <a:endParaRPr lang="en-US"/>
           </a:p>
@@ -7261,35 +4963,35 @@
           <a:p>
             <a:pPr lvl="0"/>
             <a:r>
-              <a:rPr lang="en-US" dirty="0"/>
+              <a:rPr lang="en-US"/>
               <a:t>Click to edit Master text styles</a:t>
             </a:r>
           </a:p>
           <a:p>
             <a:pPr lvl="1"/>
             <a:r>
-              <a:rPr lang="en-US" dirty="0"/>
+              <a:rPr lang="en-US"/>
               <a:t>Second level</a:t>
             </a:r>
           </a:p>
           <a:p>
             <a:pPr lvl="2"/>
             <a:r>
-              <a:rPr lang="en-US" dirty="0"/>
+              <a:rPr lang="en-US"/>
               <a:t>Third level</a:t>
             </a:r>
           </a:p>
           <a:p>
             <a:pPr lvl="3"/>
             <a:r>
-              <a:rPr lang="en-US" dirty="0"/>
+              <a:rPr lang="en-US"/>
               <a:t>Fourth level</a:t>
             </a:r>
           </a:p>
           <a:p>
             <a:pPr lvl="4"/>
             <a:r>
-              <a:rPr lang="en-US" dirty="0"/>
+              <a:rPr lang="en-US"/>
               <a:t>Fifth level</a:t>
             </a:r>
           </a:p>
@@ -7318,7 +5020,7 @@
           <a:p>
             <a:fld id="{72345051-2045-45DA-935E-2E3CA1A69ADC}" type="datetimeFigureOut">
               <a:rPr lang="en-US" smtClean="0"/>
-              <a:t>5/5/26</a:t>
+              <a:t>5/6/26</a:t>
             </a:fld>
             <a:endParaRPr lang="en-US"/>
           </a:p>
@@ -7433,7 +5135,6 @@
               <a:rPr lang="en-US"/>
               <a:t>Click to edit Master title style</a:t>
             </a:r>
-            <a:endParaRPr lang="en-US" dirty="0"/>
           </a:p>
         </p:txBody>
       </p:sp>
@@ -7483,35 +5184,35 @@
           <a:p>
             <a:pPr lvl="0"/>
             <a:r>
-              <a:rPr lang="en-US" dirty="0"/>
+              <a:rPr lang="en-US"/>
               <a:t>Click to edit Master text styles</a:t>
             </a:r>
           </a:p>
           <a:p>
             <a:pPr lvl="1"/>
             <a:r>
-              <a:rPr lang="en-US" dirty="0"/>
+              <a:rPr lang="en-US"/>
               <a:t>Second level</a:t>
             </a:r>
           </a:p>
           <a:p>
             <a:pPr lvl="2"/>
             <a:r>
-              <a:rPr lang="en-US" dirty="0"/>
+              <a:rPr lang="en-US"/>
               <a:t>Third level</a:t>
             </a:r>
           </a:p>
           <a:p>
             <a:pPr lvl="3"/>
             <a:r>
-              <a:rPr lang="en-US" dirty="0"/>
+              <a:rPr lang="en-US"/>
               <a:t>Fourth level</a:t>
             </a:r>
           </a:p>
           <a:p>
             <a:pPr lvl="4"/>
             <a:r>
-              <a:rPr lang="en-US" dirty="0"/>
+              <a:rPr lang="en-US"/>
               <a:t>Fifth level</a:t>
             </a:r>
           </a:p>
@@ -7540,7 +5241,7 @@
           <a:p>
             <a:fld id="{72345051-2045-45DA-935E-2E3CA1A69ADC}" type="datetimeFigureOut">
               <a:rPr lang="en-US" smtClean="0"/>
-              <a:t>5/5/26</a:t>
+              <a:t>5/6/26</a:t>
             </a:fld>
             <a:endParaRPr lang="en-US"/>
           </a:p>
@@ -8297,7 +5998,6 @@
               <a:rPr lang="en-US"/>
               <a:t>Click to edit Master title style</a:t>
             </a:r>
-            <a:endParaRPr lang="en-US" dirty="0"/>
           </a:p>
         </p:txBody>
       </p:sp>
@@ -8451,7 +6151,7 @@
           <a:p>
             <a:fld id="{72345051-2045-45DA-935E-2E3CA1A69ADC}" type="datetimeFigureOut">
               <a:rPr lang="en-US" smtClean="0"/>
-              <a:t>5/5/26</a:t>
+              <a:t>5/6/26</a:t>
             </a:fld>
             <a:endParaRPr lang="en-US"/>
           </a:p>
@@ -8902,7 +6602,6 @@
               <a:rPr lang="en-US"/>
               <a:t>Click to edit Master title style</a:t>
             </a:r>
-            <a:endParaRPr lang="en-US" dirty="0"/>
           </a:p>
         </p:txBody>
       </p:sp>
@@ -8934,35 +6633,35 @@
           <a:p>
             <a:pPr lvl="0"/>
             <a:r>
-              <a:rPr lang="en-US" dirty="0"/>
+              <a:rPr lang="en-US"/>
               <a:t>Click to edit Master text styles</a:t>
             </a:r>
           </a:p>
           <a:p>
             <a:pPr lvl="1"/>
             <a:r>
-              <a:rPr lang="en-US" dirty="0"/>
+              <a:rPr lang="en-US"/>
               <a:t>Second level</a:t>
             </a:r>
           </a:p>
           <a:p>
             <a:pPr lvl="2"/>
             <a:r>
-              <a:rPr lang="en-US" dirty="0"/>
+              <a:rPr lang="en-US"/>
               <a:t>Third level</a:t>
             </a:r>
           </a:p>
           <a:p>
             <a:pPr lvl="3"/>
             <a:r>
-              <a:rPr lang="en-US" dirty="0"/>
+              <a:rPr lang="en-US"/>
               <a:t>Fourth level</a:t>
             </a:r>
           </a:p>
           <a:p>
             <a:pPr lvl="4"/>
             <a:r>
-              <a:rPr lang="en-US" dirty="0"/>
+              <a:rPr lang="en-US"/>
               <a:t>Fifth level</a:t>
             </a:r>
           </a:p>
@@ -9027,7 +6726,6 @@
               <a:rPr lang="en-US"/>
               <a:t>Fifth level</a:t>
             </a:r>
-            <a:endParaRPr lang="en-US" dirty="0"/>
           </a:p>
         </p:txBody>
       </p:sp>
@@ -9054,7 +6752,7 @@
           <a:p>
             <a:fld id="{72345051-2045-45DA-935E-2E3CA1A69ADC}" type="datetimeFigureOut">
               <a:rPr lang="en-US" smtClean="0"/>
-              <a:t>5/5/26</a:t>
+              <a:t>5/6/26</a:t>
             </a:fld>
             <a:endParaRPr lang="en-US"/>
           </a:p>
@@ -9909,35 +7607,35 @@
           <a:p>
             <a:pPr lvl="0"/>
             <a:r>
-              <a:rPr lang="en-US" dirty="0"/>
+              <a:rPr lang="en-US"/>
               <a:t>Click to edit Master text styles</a:t>
             </a:r>
           </a:p>
           <a:p>
             <a:pPr lvl="1"/>
             <a:r>
-              <a:rPr lang="en-US" dirty="0"/>
+              <a:rPr lang="en-US"/>
               <a:t>Second level</a:t>
             </a:r>
           </a:p>
           <a:p>
             <a:pPr lvl="2"/>
             <a:r>
-              <a:rPr lang="en-US" dirty="0"/>
+              <a:rPr lang="en-US"/>
               <a:t>Third level</a:t>
             </a:r>
           </a:p>
           <a:p>
             <a:pPr lvl="3"/>
             <a:r>
-              <a:rPr lang="en-US" dirty="0"/>
+              <a:rPr lang="en-US"/>
               <a:t>Fourth level</a:t>
             </a:r>
           </a:p>
           <a:p>
             <a:pPr lvl="4"/>
             <a:r>
-              <a:rPr lang="en-US" dirty="0"/>
+              <a:rPr lang="en-US"/>
               <a:t>Fifth level</a:t>
             </a:r>
           </a:p>
@@ -10075,7 +7773,6 @@
               <a:rPr lang="en-US"/>
               <a:t>Fifth level</a:t>
             </a:r>
-            <a:endParaRPr lang="en-US" dirty="0"/>
           </a:p>
         </p:txBody>
       </p:sp>
@@ -10102,7 +7799,7 @@
           <a:p>
             <a:fld id="{72345051-2045-45DA-935E-2E3CA1A69ADC}" type="datetimeFigureOut">
               <a:rPr lang="en-US" smtClean="0"/>
-              <a:t>5/5/26</a:t>
+              <a:t>5/6/26</a:t>
             </a:fld>
             <a:endParaRPr lang="en-US"/>
           </a:p>
@@ -10859,7 +8556,6 @@
               <a:rPr lang="en-US"/>
               <a:t>Click to edit Master title style</a:t>
             </a:r>
-            <a:endParaRPr lang="en-US" dirty="0"/>
           </a:p>
         </p:txBody>
       </p:sp>
@@ -10886,7 +8582,7 @@
           <a:p>
             <a:fld id="{72345051-2045-45DA-935E-2E3CA1A69ADC}" type="datetimeFigureOut">
               <a:rPr lang="en-US" smtClean="0"/>
-              <a:t>5/5/26</a:t>
+              <a:t>5/6/26</a:t>
             </a:fld>
             <a:endParaRPr lang="en-US"/>
           </a:p>
@@ -11335,7 +9031,7 @@
           <a:p>
             <a:fld id="{72345051-2045-45DA-935E-2E3CA1A69ADC}" type="datetimeFigureOut">
               <a:rPr lang="en-US" smtClean="0"/>
-              <a:t>5/5/26</a:t>
+              <a:t>5/6/26</a:t>
             </a:fld>
             <a:endParaRPr lang="en-US"/>
           </a:p>
@@ -11461,7 +9157,6 @@
               <a:rPr lang="en-US"/>
               <a:t>Click to edit Master title style</a:t>
             </a:r>
-            <a:endParaRPr lang="en-US" dirty="0"/>
           </a:p>
         </p:txBody>
       </p:sp>
@@ -11552,7 +9247,6 @@
               <a:rPr lang="en-US"/>
               <a:t>Fifth level</a:t>
             </a:r>
-            <a:endParaRPr lang="en-US" dirty="0"/>
           </a:p>
         </p:txBody>
       </p:sp>
@@ -11623,7 +9317,7 @@
           <a:p>
             <a:pPr lvl="0"/>
             <a:r>
-              <a:rPr lang="en-US" dirty="0"/>
+              <a:rPr lang="en-US"/>
               <a:t>Click to edit Master text styles</a:t>
             </a:r>
           </a:p>
@@ -11652,7 +9346,7 @@
           <a:p>
             <a:fld id="{72345051-2045-45DA-935E-2E3CA1A69ADC}" type="datetimeFigureOut">
               <a:rPr lang="en-US" smtClean="0"/>
-              <a:t>5/5/26</a:t>
+              <a:t>5/6/26</a:t>
             </a:fld>
             <a:endParaRPr lang="en-US"/>
           </a:p>
@@ -12110,7 +9804,6 @@
               <a:rPr lang="en-US"/>
               <a:t>Click to edit Master title style</a:t>
             </a:r>
-            <a:endParaRPr lang="en-US" dirty="0"/>
           </a:p>
         </p:txBody>
       </p:sp>
@@ -12251,7 +9944,7 @@
           <a:p>
             <a:pPr lvl="0"/>
             <a:r>
-              <a:rPr lang="en-US" dirty="0"/>
+              <a:rPr lang="en-US"/>
               <a:t>Click to edit Master text styles</a:t>
             </a:r>
           </a:p>
@@ -12280,7 +9973,7 @@
           <a:p>
             <a:fld id="{72345051-2045-45DA-935E-2E3CA1A69ADC}" type="datetimeFigureOut">
               <a:rPr lang="en-US" smtClean="0"/>
-              <a:t>5/5/26</a:t>
+              <a:t>5/6/26</a:t>
             </a:fld>
             <a:endParaRPr lang="en-US"/>
           </a:p>
@@ -12739,7 +10432,7 @@
           <a:lstStyle/>
           <a:p>
             <a:r>
-              <a:rPr lang="en-US" dirty="0"/>
+              <a:rPr lang="en-US"/>
               <a:t>Click to edit Master title style</a:t>
             </a:r>
           </a:p>
@@ -12778,35 +10471,35 @@
           <a:p>
             <a:pPr lvl="0"/>
             <a:r>
-              <a:rPr lang="en-US" dirty="0"/>
+              <a:rPr lang="en-US"/>
               <a:t>Click to edit Master text styles</a:t>
             </a:r>
           </a:p>
           <a:p>
             <a:pPr lvl="1"/>
             <a:r>
-              <a:rPr lang="en-US" dirty="0"/>
+              <a:rPr lang="en-US"/>
               <a:t>Second level</a:t>
             </a:r>
           </a:p>
           <a:p>
             <a:pPr lvl="2"/>
             <a:r>
-              <a:rPr lang="en-US" dirty="0"/>
+              <a:rPr lang="en-US"/>
               <a:t>Third level</a:t>
             </a:r>
           </a:p>
           <a:p>
             <a:pPr lvl="3"/>
             <a:r>
-              <a:rPr lang="en-US" dirty="0"/>
+              <a:rPr lang="en-US"/>
               <a:t>Fourth level</a:t>
             </a:r>
           </a:p>
           <a:p>
             <a:pPr lvl="4"/>
             <a:r>
-              <a:rPr lang="en-US" dirty="0"/>
+              <a:rPr lang="en-US"/>
               <a:t>Fifth level</a:t>
             </a:r>
           </a:p>
@@ -12853,9 +10546,9 @@
           <a:p>
             <a:fld id="{72345051-2045-45DA-935E-2E3CA1A69ADC}" type="datetimeFigureOut">
               <a:rPr lang="en-US" smtClean="0"/>
-              <a:t>5/5/26</a:t>
+              <a:t>5/6/26</a:t>
             </a:fld>
-            <a:endParaRPr lang="en-US" dirty="0"/>
+            <a:endParaRPr lang="en-US"/>
           </a:p>
         </p:txBody>
       </p:sp>
@@ -12898,7 +10591,7 @@
             </a:lvl1pPr>
           </a:lstStyle>
           <a:p>
-            <a:endParaRPr lang="en-US" dirty="0"/>
+            <a:endParaRPr lang="en-US"/>
           </a:p>
         </p:txBody>
       </p:sp>
@@ -12945,7 +10638,7 @@
               <a:rPr lang="en-US" smtClean="0"/>
               <a:t>‹#›</a:t>
             </a:fld>
-            <a:endParaRPr lang="en-US" dirty="0"/>
+            <a:endParaRPr lang="en-US"/>
           </a:p>
         </p:txBody>
       </p:sp>
@@ -13437,7 +11130,7 @@
           <a:p>
             <a:pPr algn="ctr"/>
             <a:r>
-              <a:rPr lang="en-US" sz="3200" dirty="0"/>
+              <a:rPr lang="en-US" sz="3200"/>
               <a:t>Leen Alresheq </a:t>
             </a:r>
           </a:p>
@@ -13984,13 +11677,13 @@
           <a:lstStyle/>
           <a:p>
             <a:r>
-              <a:rPr lang="en-US" b="1" dirty="0"/>
+              <a:rPr lang="en-US" b="1"/>
               <a:t>Training Setup</a:t>
             </a:r>
             <a:br>
-              <a:rPr lang="en-US" b="1" dirty="0"/>
+              <a:rPr lang="en-US" b="1"/>
             </a:br>
-            <a:endParaRPr lang="en-US" dirty="0"/>
+            <a:endParaRPr lang="en-US"/>
           </a:p>
         </p:txBody>
       </p:sp>
@@ -14018,21 +11711,21 @@
           <a:lstStyle/>
           <a:p>
             <a:r>
-              <a:rPr lang="en-US" sz="3600" b="1" dirty="0"/>
+              <a:rPr lang="en-US" sz="3600" b="1"/>
               <a:t>Loss function:</a:t>
             </a:r>
             <a:r>
-              <a:rPr lang="en-US" sz="3600" dirty="0"/>
+              <a:rPr lang="en-US" sz="3600"/>
               <a:t> Mean Squared Error (MSE)</a:t>
             </a:r>
           </a:p>
           <a:p>
             <a:r>
-              <a:rPr lang="en-US" sz="3600" b="1" dirty="0"/>
+              <a:rPr lang="en-US" sz="3600" b="1"/>
               <a:t>Optimizer:</a:t>
             </a:r>
             <a:r>
-              <a:rPr lang="en-US" sz="3600" dirty="0"/>
+              <a:rPr lang="en-US" sz="3600"/>
               <a:t> Adam</a:t>
             </a:r>
           </a:p>
@@ -14702,8 +12395,8 @@
           </a:p>
         </p:txBody>
       </p:sp>
-      <mc:AlternateContent xmlns:mc="http://schemas.openxmlformats.org/markup-compatibility/2006" xmlns:p14="http://schemas.microsoft.com/office/powerpoint/2010/main">
-        <mc:Choice Requires="p14">
+      <mc:AlternateContent xmlns:mc="http://schemas.openxmlformats.org/markup-compatibility/2006">
+        <mc:Choice xmlns:p14="http://schemas.microsoft.com/office/powerpoint/2010/main" Requires="p14">
           <p:contentPart p14:bwMode="auto" r:id="rId3">
             <p14:nvContentPartPr>
               <p14:cNvPr id="35" name="Ink 34">
@@ -14733,7 +12426,7 @@
             </p14:xfrm>
           </p:contentPart>
         </mc:Choice>
-        <mc:Fallback xmlns="">
+        <mc:Fallback>
           <p:pic>
             <p:nvPicPr>
               <p:cNvPr id="35" name="Ink 34">
@@ -14807,7 +12500,7 @@
               <a:buChar char="•"/>
             </a:pPr>
             <a:r>
-              <a:rPr lang="en-US" sz="2400" dirty="0"/>
+              <a:rPr lang="en-US" sz="2400"/>
               <a:t>This code initializes the autoencoder, defines MSE loss to measure reconstruction error, and uses the Adam optimizer to update the model during training.</a:t>
             </a:r>
           </a:p>
@@ -14822,7 +12515,7 @@
               <a:buFont typeface="Arial" panose="020B0604020202020204" pitchFamily="34" charset="0"/>
               <a:buChar char="•"/>
             </a:pPr>
-            <a:endParaRPr lang="en-US" sz="2400" dirty="0"/>
+            <a:endParaRPr lang="en-US" sz="2400"/>
           </a:p>
         </p:txBody>
       </p:sp>
@@ -15265,14 +12958,14 @@
               <a:buChar char="•"/>
             </a:pPr>
             <a:r>
-              <a:rPr lang="en-US" sz="2800" dirty="0"/>
+              <a:rPr lang="en-US" sz="2800"/>
               <a:t>This training loop feeds batches of images into the autoencoder, computes reconstruction loss, and updates the model weights to improve image reconstruction over time.</a:t>
             </a:r>
           </a:p>
         </p:txBody>
       </p:sp>
-      <mc:AlternateContent xmlns:mc="http://schemas.openxmlformats.org/markup-compatibility/2006" xmlns:p14="http://schemas.microsoft.com/office/powerpoint/2010/main">
-        <mc:Choice Requires="p14">
+      <mc:AlternateContent xmlns:mc="http://schemas.openxmlformats.org/markup-compatibility/2006">
+        <mc:Choice xmlns:p14="http://schemas.microsoft.com/office/powerpoint/2010/main" Requires="p14">
           <p:contentPart p14:bwMode="auto" r:id="rId3">
             <p14:nvContentPartPr>
               <p14:cNvPr id="33" name="Ink 32">
@@ -15302,7 +12995,7 @@
             </p14:xfrm>
           </p:contentPart>
         </mc:Choice>
-        <mc:Fallback xmlns="">
+        <mc:Fallback>
           <p:pic>
             <p:nvPicPr>
               <p:cNvPr id="33" name="Ink 32">
@@ -15854,20 +13547,14 @@
               <a:rPr lang="en-US" sz="2800">
                 <a:latin typeface="+mn-lt"/>
               </a:rPr>
-              <a:t>This code </a:t>
-            </a:r>
-            <a:r>
-              <a:rPr lang="en-US" sz="2800" dirty="0">
-                <a:latin typeface="+mn-lt"/>
-              </a:rPr>
-              <a:t>compares original images and reconstructed outputs across different epochs to show how the autoencoder improves its reconstruction quality over time.</a:t>
+              <a:t>This code compares original images and reconstructed outputs across different epochs to show how the autoencoder improves its reconstruction quality over time.</a:t>
             </a:r>
             <a:br>
-              <a:rPr lang="en-US" sz="2800" dirty="0">
+              <a:rPr lang="en-US" sz="2800">
                 <a:latin typeface="+mn-lt"/>
               </a:rPr>
             </a:br>
-            <a:endParaRPr lang="en-US" sz="2800" dirty="0">
+            <a:endParaRPr lang="en-US" sz="2800">
               <a:latin typeface="+mn-lt"/>
             </a:endParaRPr>
           </a:p>
@@ -16224,7 +13911,7 @@
           </a:lstStyle>
           <a:p>
             <a:r>
-              <a:rPr lang="en-US" b="1" dirty="0"/>
+              <a:rPr lang="en-US" b="1"/>
               <a:t>Results</a:t>
             </a:r>
           </a:p>
@@ -17092,13 +14779,13 @@
           <a:lstStyle/>
           <a:p>
             <a:r>
-              <a:rPr lang="en-US" b="1" dirty="0"/>
+              <a:rPr lang="en-US" b="1"/>
               <a:t>Problem Being Solved</a:t>
             </a:r>
             <a:br>
-              <a:rPr lang="en-US" b="1" dirty="0"/>
+              <a:rPr lang="en-US" b="1"/>
             </a:br>
-            <a:endParaRPr lang="en-US" dirty="0"/>
+            <a:endParaRPr lang="en-US"/>
           </a:p>
         </p:txBody>
       </p:sp>
@@ -17126,32 +14813,32 @@
           <a:lstStyle/>
           <a:p>
             <a:r>
-              <a:rPr lang="en-US" sz="3600" dirty="0"/>
+              <a:rPr lang="en-US" sz="3600"/>
               <a:t>The goal of this project is to build an autoencoder that learns how to:</a:t>
             </a:r>
           </a:p>
           <a:p>
             <a:pPr lvl="1"/>
             <a:r>
-              <a:rPr lang="en-US" sz="3200" dirty="0"/>
+              <a:rPr lang="en-US" sz="3200"/>
               <a:t>Compress an image into a low-dimensional representation (embedding) </a:t>
             </a:r>
           </a:p>
           <a:p>
             <a:pPr lvl="1"/>
             <a:r>
-              <a:rPr lang="en-US" sz="3200" dirty="0"/>
+              <a:rPr lang="en-US" sz="3200"/>
               <a:t>Reconstruct the original image from that compressed form as accurately as possible </a:t>
             </a:r>
           </a:p>
           <a:p>
             <a:r>
-              <a:rPr lang="en-US" sz="3600" dirty="0"/>
+              <a:rPr lang="en-US" sz="3600"/>
               <a:t>A real-world application of this idea could be reducing the size of images or videos to save storage.</a:t>
             </a:r>
           </a:p>
           <a:p>
-            <a:endParaRPr lang="en-US" sz="3600" dirty="0"/>
+            <a:endParaRPr lang="en-US" sz="3600"/>
           </a:p>
         </p:txBody>
       </p:sp>
@@ -17209,10 +14896,10 @@
           <a:lstStyle/>
           <a:p>
             <a:r>
-              <a:rPr lang="en-US" b="1" dirty="0"/>
+              <a:rPr lang="en-US" b="1"/>
               <a:t>Data Preparation</a:t>
             </a:r>
-            <a:endParaRPr lang="en-US" dirty="0"/>
+            <a:endParaRPr lang="en-US"/>
           </a:p>
         </p:txBody>
       </p:sp>
@@ -17238,16 +14925,16 @@
           <a:lstStyle/>
           <a:p>
             <a:r>
-              <a:rPr lang="en-US" dirty="0"/>
+              <a:rPr lang="en-US"/>
               <a:t>Dataset used: </a:t>
             </a:r>
             <a:r>
-              <a:rPr lang="en-US" b="1" dirty="0"/>
+              <a:rPr lang="en-US" b="1"/>
               <a:t>MNIST handwritten digits</a:t>
             </a:r>
           </a:p>
           <a:p>
-            <a:endParaRPr lang="en-US" dirty="0"/>
+            <a:endParaRPr lang="en-US"/>
           </a:p>
         </p:txBody>
       </p:sp>
@@ -17387,14 +15074,14 @@
               <a:buChar char="•"/>
             </a:pPr>
             <a:r>
-              <a:rPr lang="en-US" sz="2800" dirty="0"/>
+              <a:rPr lang="en-US" sz="2800"/>
               <a:t>This code converts the images into tensors, groups them into batches of 64, and shuffles them so the autoencoder can train efficiently.</a:t>
             </a:r>
           </a:p>
         </p:txBody>
       </p:sp>
-      <mc:AlternateContent xmlns:mc="http://schemas.openxmlformats.org/markup-compatibility/2006" xmlns:p14="http://schemas.microsoft.com/office/powerpoint/2010/main">
-        <mc:Choice Requires="p14">
+      <mc:AlternateContent xmlns:mc="http://schemas.openxmlformats.org/markup-compatibility/2006">
+        <mc:Choice xmlns:p14="http://schemas.microsoft.com/office/powerpoint/2010/main" Requires="p14">
           <p:contentPart p14:bwMode="auto" r:id="rId3">
             <p14:nvContentPartPr>
               <p14:cNvPr id="29" name="Ink 28">
@@ -17424,7 +15111,7 @@
             </p14:xfrm>
           </p:contentPart>
         </mc:Choice>
-        <mc:Fallback xmlns="">
+        <mc:Fallback>
           <p:pic>
             <p:nvPicPr>
               <p:cNvPr id="29" name="Ink 28">
@@ -18370,8 +16057,8 @@
           </a:p>
         </p:txBody>
       </p:sp>
-      <mc:AlternateContent xmlns:mc="http://schemas.openxmlformats.org/markup-compatibility/2006" xmlns:p14="http://schemas.microsoft.com/office/powerpoint/2010/main">
-        <mc:Choice Requires="p14">
+      <mc:AlternateContent xmlns:mc="http://schemas.openxmlformats.org/markup-compatibility/2006">
+        <mc:Choice xmlns:p14="http://schemas.microsoft.com/office/powerpoint/2010/main" Requires="p14">
           <p:contentPart p14:bwMode="auto" r:id="rId3">
             <p14:nvContentPartPr>
               <p14:cNvPr id="24" name="Ink 23">
@@ -18401,7 +16088,7 @@
             </p14:xfrm>
           </p:contentPart>
         </mc:Choice>
-        <mc:Fallback xmlns="">
+        <mc:Fallback>
           <p:pic>
             <p:nvPicPr>
               <p:cNvPr id="24" name="Ink 23">
@@ -18668,7 +16355,7 @@
               <a:buChar char="•"/>
             </a:pPr>
             <a:r>
-              <a:rPr lang="en-US" sz="3600" dirty="0">
+              <a:rPr lang="en-US" sz="3600">
                 <a:solidFill>
                   <a:schemeClr val="bg1"/>
                 </a:solidFill>
@@ -18769,13 +16456,13 @@
           <a:lstStyle/>
           <a:p>
             <a:r>
-              <a:rPr lang="en-US" b="1" dirty="0"/>
+              <a:rPr lang="en-US" b="1"/>
               <a:t>Method Used to Solve It</a:t>
             </a:r>
             <a:br>
-              <a:rPr lang="en-US" b="1" dirty="0"/>
+              <a:rPr lang="en-US" b="1"/>
             </a:br>
-            <a:endParaRPr lang="en-US" dirty="0"/>
+            <a:endParaRPr lang="en-US"/>
           </a:p>
         </p:txBody>
       </p:sp>
@@ -18803,34 +16490,34 @@
           <a:lstStyle/>
           <a:p>
             <a:r>
-              <a:rPr lang="en-US" sz="3600" dirty="0"/>
+              <a:rPr lang="en-US" sz="3600"/>
               <a:t>Two different autoencoders were implemented:</a:t>
             </a:r>
           </a:p>
           <a:p>
             <a:pPr lvl="1"/>
             <a:r>
-              <a:rPr lang="en-US" sz="3200" b="1" dirty="0"/>
+              <a:rPr lang="en-US" sz="3200" b="1"/>
               <a:t>Linear Autoencoder</a:t>
             </a:r>
             <a:r>
-              <a:rPr lang="en-US" sz="3200" dirty="0"/>
+              <a:rPr lang="en-US" sz="3200"/>
               <a:t> </a:t>
             </a:r>
           </a:p>
           <a:p>
             <a:pPr lvl="1"/>
             <a:r>
-              <a:rPr lang="en-US" sz="3200" b="1" dirty="0"/>
+              <a:rPr lang="en-US" sz="3200" b="1"/>
               <a:t>Convolutional Autoencoder</a:t>
             </a:r>
             <a:r>
-              <a:rPr lang="en-US" sz="3200" dirty="0"/>
+              <a:rPr lang="en-US" sz="3200"/>
               <a:t> </a:t>
             </a:r>
           </a:p>
           <a:p>
-            <a:endParaRPr lang="en-US" sz="3600" dirty="0"/>
+            <a:endParaRPr lang="en-US" sz="3600"/>
           </a:p>
         </p:txBody>
       </p:sp>
@@ -19283,14 +16970,14 @@
               <a:buChar char="•"/>
             </a:pPr>
             <a:r>
-              <a:rPr lang="en-US" sz="3200" dirty="0"/>
+              <a:rPr lang="en-US" sz="3200"/>
               <a:t>This linear autoencoder repeatedly reduces the input size into a small embedding, then expands it to reconstruct the original image.</a:t>
             </a:r>
           </a:p>
         </p:txBody>
       </p:sp>
-      <mc:AlternateContent xmlns:mc="http://schemas.openxmlformats.org/markup-compatibility/2006" xmlns:p14="http://schemas.microsoft.com/office/powerpoint/2010/main">
-        <mc:Choice Requires="p14">
+      <mc:AlternateContent xmlns:mc="http://schemas.openxmlformats.org/markup-compatibility/2006">
+        <mc:Choice xmlns:p14="http://schemas.microsoft.com/office/powerpoint/2010/main" Requires="p14">
           <p:contentPart p14:bwMode="auto" r:id="rId3">
             <p14:nvContentPartPr>
               <p14:cNvPr id="26" name="Ink 25">
@@ -19320,7 +17007,7 @@
             </p14:xfrm>
           </p:contentPart>
         </mc:Choice>
-        <mc:Fallback xmlns="">
+        <mc:Fallback>
           <p:pic>
             <p:nvPicPr>
               <p:cNvPr id="26" name="Ink 25">
@@ -20041,8 +17728,8 @@
           </a:p>
         </p:txBody>
       </p:sp>
-      <mc:AlternateContent xmlns:mc="http://schemas.openxmlformats.org/markup-compatibility/2006" xmlns:p14="http://schemas.microsoft.com/office/powerpoint/2010/main">
-        <mc:Choice Requires="p14">
+      <mc:AlternateContent xmlns:mc="http://schemas.openxmlformats.org/markup-compatibility/2006">
+        <mc:Choice xmlns:p14="http://schemas.microsoft.com/office/powerpoint/2010/main" Requires="p14">
           <p:contentPart p14:bwMode="auto" r:id="rId3">
             <p14:nvContentPartPr>
               <p14:cNvPr id="15" name="Ink 14">
@@ -20072,7 +17759,7 @@
             </p14:xfrm>
           </p:contentPart>
         </mc:Choice>
-        <mc:Fallback xmlns="">
+        <mc:Fallback>
           <p:pic>
             <p:nvPicPr>
               <p:cNvPr id="15" name="Ink 14">
@@ -20364,7 +18051,7 @@
               <a:buChar char="•"/>
             </a:pPr>
             <a:r>
-              <a:rPr lang="en-US" sz="3200" dirty="0"/>
+              <a:rPr lang="en-US" sz="3200"/>
               <a:t>This convolutional autoencoder compresses images using convolutional layers that reduce spatial size, then reconstructs them using transpose convolutions to restore the original image.</a:t>
             </a:r>
           </a:p>
